--- a/FAPbI3合成汇总.pptx
+++ b/FAPbI3合成汇总.pptx
@@ -10,11 +10,13 @@
     <p:sldId id="360" r:id="rId4"/>
     <p:sldId id="361" r:id="rId5"/>
     <p:sldId id="362" r:id="rId6"/>
+    <p:sldId id="293" r:id="rId7"/>
+    <p:sldId id="294" r:id="rId8"/>
   </p:sldIdLst>
   <p:sldSz cx="12192000" cy="6858000"/>
   <p:notesSz cx="6858000" cy="9144000"/>
   <p:custDataLst>
-    <p:tags r:id="rId7"/>
+    <p:tags r:id="rId9"/>
   </p:custDataLst>
   <p:defaultTextStyle>
     <a:defPPr>
@@ -248,7 +250,7 @@
           <a:p>
             <a:fld id="{27347B32-6A7D-4B63-8B88-3F04635095CD}" type="datetimeFigureOut">
               <a:rPr lang="zh-CN" altLang="en-US" smtClean="0"/>
-              <a:t>2024/9/29</a:t>
+              <a:t>2024/10/12</a:t>
             </a:fld>
             <a:endParaRPr lang="zh-CN" altLang="en-US"/>
           </a:p>
@@ -411,7 +413,7 @@
           <a:p>
             <a:fld id="{27347B32-6A7D-4B63-8B88-3F04635095CD}" type="datetimeFigureOut">
               <a:rPr lang="zh-CN" altLang="en-US" smtClean="0"/>
-              <a:t>2024/9/29</a:t>
+              <a:t>2024/10/12</a:t>
             </a:fld>
             <a:endParaRPr lang="zh-CN" altLang="en-US"/>
           </a:p>
@@ -584,7 +586,7 @@
           <a:p>
             <a:fld id="{27347B32-6A7D-4B63-8B88-3F04635095CD}" type="datetimeFigureOut">
               <a:rPr lang="zh-CN" altLang="en-US" smtClean="0"/>
-              <a:t>2024/9/29</a:t>
+              <a:t>2024/10/12</a:t>
             </a:fld>
             <a:endParaRPr lang="zh-CN" altLang="en-US"/>
           </a:p>
@@ -633,6 +635,119 @@
         </p:txBody>
       </p:sp>
     </p:spTree>
+  </p:cSld>
+  <p:clrMapOvr>
+    <a:masterClrMapping/>
+  </p:clrMapOvr>
+</p:sldLayout>
+</file>
+
+<file path=ppt/slideLayouts/slideLayout12.xml><?xml version="1.0" encoding="utf-8"?>
+<p:sldLayout xmlns:a="http://schemas.openxmlformats.org/drawingml/2006/main" xmlns:r="http://schemas.openxmlformats.org/officeDocument/2006/relationships" xmlns:p="http://schemas.openxmlformats.org/presentationml/2006/main" userDrawn="1">
+  <p:cSld name="1_仅标题">
+    <p:spTree>
+      <p:nvGrpSpPr>
+        <p:cNvPr id="1" name=""/>
+        <p:cNvGrpSpPr/>
+        <p:nvPr/>
+      </p:nvGrpSpPr>
+      <p:grpSpPr>
+        <a:xfrm>
+          <a:off x="0" y="0"/>
+          <a:ext cx="0" cy="0"/>
+          <a:chOff x="0" y="0"/>
+          <a:chExt cx="0" cy="0"/>
+        </a:xfrm>
+      </p:grpSpPr>
+      <p:sp>
+        <p:nvSpPr>
+          <p:cNvPr id="3" name="日期占位符 2">
+            <a:extLst>
+              <a:ext uri="{FF2B5EF4-FFF2-40B4-BE49-F238E27FC236}">
+                <a16:creationId xmlns:a16="http://schemas.microsoft.com/office/drawing/2014/main" id="{DB0AEA36-5DE6-45B7-8297-10BADF3EB89A}"/>
+              </a:ext>
+            </a:extLst>
+          </p:cNvPr>
+          <p:cNvSpPr>
+            <a:spLocks noGrp="1"/>
+          </p:cNvSpPr>
+          <p:nvPr>
+            <p:ph type="dt" sz="half" idx="10"/>
+          </p:nvPr>
+        </p:nvSpPr>
+        <p:spPr/>
+        <p:txBody>
+          <a:bodyPr/>
+          <a:lstStyle/>
+          <a:p>
+            <a:fld id="{407A2EF7-7F0C-4E84-B18C-B3F19A6758E7}" type="datetimeFigureOut">
+              <a:rPr lang="en-HK" smtClean="0"/>
+              <a:t>12/10/2024</a:t>
+            </a:fld>
+            <a:endParaRPr lang="en-HK"/>
+          </a:p>
+        </p:txBody>
+      </p:sp>
+      <p:sp>
+        <p:nvSpPr>
+          <p:cNvPr id="4" name="页脚占位符 3">
+            <a:extLst>
+              <a:ext uri="{FF2B5EF4-FFF2-40B4-BE49-F238E27FC236}">
+                <a16:creationId xmlns:a16="http://schemas.microsoft.com/office/drawing/2014/main" id="{5F4880B7-27C4-43AC-8ED4-B106EF2FBBAB}"/>
+              </a:ext>
+            </a:extLst>
+          </p:cNvPr>
+          <p:cNvSpPr>
+            <a:spLocks noGrp="1"/>
+          </p:cNvSpPr>
+          <p:nvPr>
+            <p:ph type="ftr" sz="quarter" idx="11"/>
+          </p:nvPr>
+        </p:nvSpPr>
+        <p:spPr/>
+        <p:txBody>
+          <a:bodyPr/>
+          <a:lstStyle/>
+          <a:p>
+            <a:endParaRPr lang="en-HK"/>
+          </a:p>
+        </p:txBody>
+      </p:sp>
+      <p:sp>
+        <p:nvSpPr>
+          <p:cNvPr id="5" name="灯片编号占位符 4">
+            <a:extLst>
+              <a:ext uri="{FF2B5EF4-FFF2-40B4-BE49-F238E27FC236}">
+                <a16:creationId xmlns:a16="http://schemas.microsoft.com/office/drawing/2014/main" id="{8E2732FF-00BC-4316-8E76-94F48AE49FCC}"/>
+              </a:ext>
+            </a:extLst>
+          </p:cNvPr>
+          <p:cNvSpPr>
+            <a:spLocks noGrp="1"/>
+          </p:cNvSpPr>
+          <p:nvPr>
+            <p:ph type="sldNum" sz="quarter" idx="12"/>
+          </p:nvPr>
+        </p:nvSpPr>
+        <p:spPr/>
+        <p:txBody>
+          <a:bodyPr/>
+          <a:lstStyle/>
+          <a:p>
+            <a:fld id="{CA3FF022-E06A-483A-8B5D-D9E4F98B7101}" type="slidenum">
+              <a:rPr lang="en-HK" smtClean="0"/>
+              <a:t>‹#›</a:t>
+            </a:fld>
+            <a:endParaRPr lang="en-HK"/>
+          </a:p>
+        </p:txBody>
+      </p:sp>
+    </p:spTree>
+    <p:extLst>
+      <p:ext uri="{BB962C8B-B14F-4D97-AF65-F5344CB8AC3E}">
+        <p14:creationId xmlns:p14="http://schemas.microsoft.com/office/powerpoint/2010/main" val="2967930352"/>
+      </p:ext>
+    </p:extLst>
   </p:cSld>
   <p:clrMapOvr>
     <a:masterClrMapping/>
@@ -747,7 +862,7 @@
           <a:p>
             <a:fld id="{27347B32-6A7D-4B63-8B88-3F04635095CD}" type="datetimeFigureOut">
               <a:rPr lang="zh-CN" altLang="en-US" smtClean="0"/>
-              <a:t>2024/9/29</a:t>
+              <a:t>2024/10/12</a:t>
             </a:fld>
             <a:endParaRPr lang="zh-CN" altLang="en-US"/>
           </a:p>
@@ -987,7 +1102,7 @@
           <a:p>
             <a:fld id="{27347B32-6A7D-4B63-8B88-3F04635095CD}" type="datetimeFigureOut">
               <a:rPr lang="zh-CN" altLang="en-US" smtClean="0"/>
-              <a:t>2024/9/29</a:t>
+              <a:t>2024/10/12</a:t>
             </a:fld>
             <a:endParaRPr lang="zh-CN" altLang="en-US"/>
           </a:p>
@@ -1211,7 +1326,7 @@
           <a:p>
             <a:fld id="{27347B32-6A7D-4B63-8B88-3F04635095CD}" type="datetimeFigureOut">
               <a:rPr lang="zh-CN" altLang="en-US" smtClean="0"/>
-              <a:t>2024/9/29</a:t>
+              <a:t>2024/10/12</a:t>
             </a:fld>
             <a:endParaRPr lang="zh-CN" altLang="en-US"/>
           </a:p>
@@ -1570,7 +1685,7 @@
           <a:p>
             <a:fld id="{27347B32-6A7D-4B63-8B88-3F04635095CD}" type="datetimeFigureOut">
               <a:rPr lang="zh-CN" altLang="en-US" smtClean="0"/>
-              <a:t>2024/9/29</a:t>
+              <a:t>2024/10/12</a:t>
             </a:fld>
             <a:endParaRPr lang="zh-CN" altLang="en-US"/>
           </a:p>
@@ -1682,7 +1797,7 @@
           <a:p>
             <a:fld id="{27347B32-6A7D-4B63-8B88-3F04635095CD}" type="datetimeFigureOut">
               <a:rPr lang="zh-CN" altLang="en-US" smtClean="0"/>
-              <a:t>2024/9/29</a:t>
+              <a:t>2024/10/12</a:t>
             </a:fld>
             <a:endParaRPr lang="zh-CN" altLang="en-US"/>
           </a:p>
@@ -1772,7 +1887,7 @@
           <a:p>
             <a:fld id="{27347B32-6A7D-4B63-8B88-3F04635095CD}" type="datetimeFigureOut">
               <a:rPr lang="zh-CN" altLang="en-US" smtClean="0"/>
-              <a:t>2024/9/29</a:t>
+              <a:t>2024/10/12</a:t>
             </a:fld>
             <a:endParaRPr lang="zh-CN" altLang="en-US"/>
           </a:p>
@@ -2042,7 +2157,7 @@
           <a:p>
             <a:fld id="{27347B32-6A7D-4B63-8B88-3F04635095CD}" type="datetimeFigureOut">
               <a:rPr lang="zh-CN" altLang="en-US" smtClean="0"/>
-              <a:t>2024/9/29</a:t>
+              <a:t>2024/10/12</a:t>
             </a:fld>
             <a:endParaRPr lang="zh-CN" altLang="en-US"/>
           </a:p>
@@ -2289,7 +2404,7 @@
           <a:p>
             <a:fld id="{27347B32-6A7D-4B63-8B88-3F04635095CD}" type="datetimeFigureOut">
               <a:rPr lang="zh-CN" altLang="en-US" smtClean="0"/>
-              <a:t>2024/9/29</a:t>
+              <a:t>2024/10/12</a:t>
             </a:fld>
             <a:endParaRPr lang="zh-CN" altLang="en-US"/>
           </a:p>
@@ -2495,7 +2610,7 @@
           <a:p>
             <a:fld id="{27347B32-6A7D-4B63-8B88-3F04635095CD}" type="datetimeFigureOut">
               <a:rPr lang="zh-CN" altLang="en-US" smtClean="0"/>
-              <a:t>2024/9/29</a:t>
+              <a:t>2024/10/12</a:t>
             </a:fld>
             <a:endParaRPr lang="zh-CN" altLang="en-US"/>
           </a:p>
@@ -2594,6 +2709,7 @@
     <p:sldLayoutId id="2147483669" r:id="rId9"/>
     <p:sldLayoutId id="2147483670" r:id="rId10"/>
     <p:sldLayoutId id="2147483671" r:id="rId11"/>
+    <p:sldLayoutId id="2147483672" r:id="rId12"/>
   </p:sldLayoutIdLst>
   <p:txStyles>
     <p:titleStyle>
@@ -14964,6 +15080,3921 @@
 </p:sld>
 </file>
 
+<file path=ppt/slides/slide6.xml><?xml version="1.0" encoding="utf-8"?>
+<p:sld xmlns:a="http://schemas.openxmlformats.org/drawingml/2006/main" xmlns:r="http://schemas.openxmlformats.org/officeDocument/2006/relationships" xmlns:p="http://schemas.openxmlformats.org/presentationml/2006/main">
+  <p:cSld>
+    <p:spTree>
+      <p:nvGrpSpPr>
+        <p:cNvPr id="1" name=""/>
+        <p:cNvGrpSpPr/>
+        <p:nvPr/>
+      </p:nvGrpSpPr>
+      <p:grpSpPr>
+        <a:xfrm>
+          <a:off x="0" y="0"/>
+          <a:ext cx="0" cy="0"/>
+          <a:chOff x="0" y="0"/>
+          <a:chExt cx="0" cy="0"/>
+        </a:xfrm>
+      </p:grpSpPr>
+      <p:graphicFrame>
+        <p:nvGraphicFramePr>
+          <p:cNvPr id="2" name="表格 1">
+            <a:extLst>
+              <a:ext uri="{FF2B5EF4-FFF2-40B4-BE49-F238E27FC236}">
+                <a16:creationId xmlns:a16="http://schemas.microsoft.com/office/drawing/2014/main" id="{BFB313C5-121B-A069-8A1A-ECD8B02154A5}"/>
+              </a:ext>
+            </a:extLst>
+          </p:cNvPr>
+          <p:cNvGraphicFramePr>
+            <a:graphicFrameLocks noGrp="1"/>
+          </p:cNvGraphicFramePr>
+          <p:nvPr/>
+        </p:nvGraphicFramePr>
+        <p:xfrm>
+          <a:off x="250823" y="132749"/>
+          <a:ext cx="11690354" cy="6690789"/>
+        </p:xfrm>
+        <a:graphic>
+          <a:graphicData uri="http://schemas.openxmlformats.org/drawingml/2006/table">
+            <a:tbl>
+              <a:tblPr firstRow="1" firstCol="1" bandRow="1"/>
+              <a:tblGrid>
+                <a:gridCol w="1472298">
+                  <a:extLst>
+                    <a:ext uri="{9D8B030D-6E8A-4147-A177-3AD203B41FA5}">
+                      <a16:colId xmlns:a16="http://schemas.microsoft.com/office/drawing/2014/main" val="2797760580"/>
+                    </a:ext>
+                  </a:extLst>
+                </a:gridCol>
+                <a:gridCol w="1584420">
+                  <a:extLst>
+                    <a:ext uri="{9D8B030D-6E8A-4147-A177-3AD203B41FA5}">
+                      <a16:colId xmlns:a16="http://schemas.microsoft.com/office/drawing/2014/main" val="1843191948"/>
+                    </a:ext>
+                  </a:extLst>
+                </a:gridCol>
+                <a:gridCol w="1468819">
+                  <a:extLst>
+                    <a:ext uri="{9D8B030D-6E8A-4147-A177-3AD203B41FA5}">
+                      <a16:colId xmlns:a16="http://schemas.microsoft.com/office/drawing/2014/main" val="348636122"/>
+                    </a:ext>
+                  </a:extLst>
+                </a:gridCol>
+                <a:gridCol w="1718343">
+                  <a:extLst>
+                    <a:ext uri="{9D8B030D-6E8A-4147-A177-3AD203B41FA5}">
+                      <a16:colId xmlns:a16="http://schemas.microsoft.com/office/drawing/2014/main" val="3197191185"/>
+                    </a:ext>
+                  </a:extLst>
+                </a:gridCol>
+                <a:gridCol w="1360639">
+                  <a:extLst>
+                    <a:ext uri="{9D8B030D-6E8A-4147-A177-3AD203B41FA5}">
+                      <a16:colId xmlns:a16="http://schemas.microsoft.com/office/drawing/2014/main" val="3398833074"/>
+                    </a:ext>
+                  </a:extLst>
+                </a:gridCol>
+                <a:gridCol w="1596861">
+                  <a:extLst>
+                    <a:ext uri="{9D8B030D-6E8A-4147-A177-3AD203B41FA5}">
+                      <a16:colId xmlns:a16="http://schemas.microsoft.com/office/drawing/2014/main" val="1261956388"/>
+                    </a:ext>
+                  </a:extLst>
+                </a:gridCol>
+                <a:gridCol w="1108891">
+                  <a:extLst>
+                    <a:ext uri="{9D8B030D-6E8A-4147-A177-3AD203B41FA5}">
+                      <a16:colId xmlns:a16="http://schemas.microsoft.com/office/drawing/2014/main" val="946451982"/>
+                    </a:ext>
+                  </a:extLst>
+                </a:gridCol>
+                <a:gridCol w="1380083">
+                  <a:extLst>
+                    <a:ext uri="{9D8B030D-6E8A-4147-A177-3AD203B41FA5}">
+                      <a16:colId xmlns:a16="http://schemas.microsoft.com/office/drawing/2014/main" val="2068218153"/>
+                    </a:ext>
+                  </a:extLst>
+                </a:gridCol>
+              </a:tblGrid>
+              <a:tr h="514677">
+                <a:tc>
+                  <a:txBody>
+                    <a:bodyPr/>
+                    <a:lstStyle/>
+                    <a:p>
+                      <a:pPr algn="ctr"/>
+                      <a:r>
+                        <a:rPr lang="zh-CN" sz="1600" kern="100" dirty="0">
+                          <a:effectLst/>
+                          <a:latin typeface="等线" panose="02010600030101010101" pitchFamily="2" charset="-122"/>
+                          <a:ea typeface="等线" panose="02010600030101010101" pitchFamily="2" charset="-122"/>
+                          <a:cs typeface="Times New Roman" panose="02020603050405020304" pitchFamily="18" charset="0"/>
+                        </a:rPr>
+                        <a:t>实验编号</a:t>
+                      </a:r>
+                    </a:p>
+                  </a:txBody>
+                  <a:tcPr marL="68580" marR="68580" marT="0" marB="0" anchor="ctr">
+                    <a:lnL>
+                      <a:noFill/>
+                    </a:lnL>
+                    <a:lnR>
+                      <a:noFill/>
+                    </a:lnR>
+                    <a:lnT w="12700" cap="flat" cmpd="sng" algn="ctr">
+                      <a:solidFill>
+                        <a:srgbClr val="000000"/>
+                      </a:solidFill>
+                      <a:prstDash val="solid"/>
+                      <a:round/>
+                      <a:headEnd type="none" w="med" len="med"/>
+                      <a:tailEnd type="none" w="med" len="med"/>
+                    </a:lnT>
+                    <a:lnB w="12700" cap="flat" cmpd="sng" algn="ctr">
+                      <a:solidFill>
+                        <a:srgbClr val="000000"/>
+                      </a:solidFill>
+                      <a:prstDash val="solid"/>
+                      <a:round/>
+                      <a:headEnd type="none" w="med" len="med"/>
+                      <a:tailEnd type="none" w="med" len="med"/>
+                    </a:lnB>
+                    <a:noFill/>
+                  </a:tcPr>
+                </a:tc>
+                <a:tc>
+                  <a:txBody>
+                    <a:bodyPr/>
+                    <a:lstStyle/>
+                    <a:p>
+                      <a:pPr algn="ctr"/>
+                      <a:r>
+                        <a:rPr lang="en-US" sz="1600" kern="100" dirty="0" err="1">
+                          <a:effectLst/>
+                          <a:latin typeface="等线" panose="02010600030101010101" pitchFamily="2" charset="-122"/>
+                          <a:ea typeface="等线" panose="02010600030101010101" pitchFamily="2" charset="-122"/>
+                          <a:cs typeface="Times New Roman" panose="02020603050405020304" pitchFamily="18" charset="0"/>
+                        </a:rPr>
+                        <a:t>FAAc</a:t>
+                      </a:r>
+                      <a:endParaRPr lang="zh-CN" sz="1600" kern="100" dirty="0">
+                        <a:effectLst/>
+                        <a:latin typeface="等线" panose="02010600030101010101" pitchFamily="2" charset="-122"/>
+                        <a:ea typeface="等线" panose="02010600030101010101" pitchFamily="2" charset="-122"/>
+                        <a:cs typeface="Times New Roman" panose="02020603050405020304" pitchFamily="18" charset="0"/>
+                      </a:endParaRPr>
+                    </a:p>
+                  </a:txBody>
+                  <a:tcPr marL="68580" marR="68580" marT="0" marB="0" anchor="ctr">
+                    <a:lnL>
+                      <a:noFill/>
+                    </a:lnL>
+                    <a:lnR>
+                      <a:noFill/>
+                    </a:lnR>
+                    <a:lnT w="12700" cap="flat" cmpd="sng" algn="ctr">
+                      <a:solidFill>
+                        <a:srgbClr val="000000"/>
+                      </a:solidFill>
+                      <a:prstDash val="solid"/>
+                      <a:round/>
+                      <a:headEnd type="none" w="med" len="med"/>
+                      <a:tailEnd type="none" w="med" len="med"/>
+                    </a:lnT>
+                    <a:lnB w="12700" cap="flat" cmpd="sng" algn="ctr">
+                      <a:solidFill>
+                        <a:srgbClr val="000000"/>
+                      </a:solidFill>
+                      <a:prstDash val="solid"/>
+                      <a:round/>
+                      <a:headEnd type="none" w="med" len="med"/>
+                      <a:tailEnd type="none" w="med" len="med"/>
+                    </a:lnB>
+                    <a:noFill/>
+                  </a:tcPr>
+                </a:tc>
+                <a:tc>
+                  <a:txBody>
+                    <a:bodyPr/>
+                    <a:lstStyle/>
+                    <a:p>
+                      <a:pPr algn="ctr"/>
+                      <a:r>
+                        <a:rPr lang="en-US" altLang="zh-CN" sz="1600" dirty="0">
+                          <a:latin typeface="Times New Roman" panose="02020603050405020304" pitchFamily="18" charset="0"/>
+                          <a:ea typeface="宋体" panose="02010600030101010101" pitchFamily="2" charset="-122"/>
+                        </a:rPr>
+                        <a:t>PbAc</a:t>
+                      </a:r>
+                      <a:r>
+                        <a:rPr lang="en-US" altLang="zh-CN" sz="1600" baseline="-25000" dirty="0">
+                          <a:latin typeface="Times New Roman" panose="02020603050405020304" pitchFamily="18" charset="0"/>
+                          <a:ea typeface="宋体" panose="02010600030101010101" pitchFamily="2" charset="-122"/>
+                        </a:rPr>
+                        <a:t>2</a:t>
+                      </a:r>
+                      <a:r>
+                        <a:rPr lang="en-US" altLang="zh-CN" sz="1600" dirty="0">
+                          <a:latin typeface="Times New Roman" panose="02020603050405020304" pitchFamily="18" charset="0"/>
+                          <a:ea typeface="宋体" panose="02010600030101010101" pitchFamily="2" charset="-122"/>
+                        </a:rPr>
+                        <a:t>·3H</a:t>
+                      </a:r>
+                      <a:r>
+                        <a:rPr lang="en-US" altLang="zh-CN" sz="1600" baseline="-25000" dirty="0">
+                          <a:latin typeface="Times New Roman" panose="02020603050405020304" pitchFamily="18" charset="0"/>
+                          <a:ea typeface="宋体" panose="02010600030101010101" pitchFamily="2" charset="-122"/>
+                        </a:rPr>
+                        <a:t>2</a:t>
+                      </a:r>
+                      <a:r>
+                        <a:rPr lang="en-US" altLang="zh-CN" sz="1600" dirty="0">
+                          <a:latin typeface="Times New Roman" panose="02020603050405020304" pitchFamily="18" charset="0"/>
+                          <a:ea typeface="宋体" panose="02010600030101010101" pitchFamily="2" charset="-122"/>
+                        </a:rPr>
+                        <a:t>O</a:t>
+                      </a:r>
+                      <a:endParaRPr lang="en-US" altLang="zh-CN" sz="1600" kern="100" dirty="0">
+                        <a:effectLst/>
+                        <a:latin typeface="等线" panose="02010600030101010101" pitchFamily="2" charset="-122"/>
+                        <a:ea typeface="+mn-ea"/>
+                        <a:cs typeface="Times New Roman" panose="02020603050405020304" pitchFamily="18" charset="0"/>
+                      </a:endParaRPr>
+                    </a:p>
+                  </a:txBody>
+                  <a:tcPr marL="68580" marR="68580" marT="0" marB="0" anchor="ctr">
+                    <a:lnL>
+                      <a:noFill/>
+                    </a:lnL>
+                    <a:lnR>
+                      <a:noFill/>
+                    </a:lnR>
+                    <a:lnT w="12700" cap="flat" cmpd="sng" algn="ctr">
+                      <a:solidFill>
+                        <a:srgbClr val="000000"/>
+                      </a:solidFill>
+                      <a:prstDash val="solid"/>
+                      <a:round/>
+                      <a:headEnd type="none" w="med" len="med"/>
+                      <a:tailEnd type="none" w="med" len="med"/>
+                    </a:lnT>
+                    <a:lnB w="12700" cap="flat" cmpd="sng" algn="ctr">
+                      <a:solidFill>
+                        <a:srgbClr val="000000"/>
+                      </a:solidFill>
+                      <a:prstDash val="solid"/>
+                      <a:round/>
+                      <a:headEnd type="none" w="med" len="med"/>
+                      <a:tailEnd type="none" w="med" len="med"/>
+                    </a:lnB>
+                    <a:noFill/>
+                  </a:tcPr>
+                </a:tc>
+                <a:tc>
+                  <a:txBody>
+                    <a:bodyPr/>
+                    <a:lstStyle/>
+                    <a:p>
+                      <a:pPr algn="ctr"/>
+                      <a:r>
+                        <a:rPr lang="en-US" sz="1600" kern="100">
+                          <a:effectLst/>
+                          <a:latin typeface="等线" panose="02010600030101010101" pitchFamily="2" charset="-122"/>
+                          <a:ea typeface="等线" panose="02010600030101010101" pitchFamily="2" charset="-122"/>
+                          <a:cs typeface="Times New Roman" panose="02020603050405020304" pitchFamily="18" charset="0"/>
+                        </a:rPr>
+                        <a:t>HI</a:t>
+                      </a:r>
+                      <a:endParaRPr lang="zh-CN" sz="1600" kern="100">
+                        <a:effectLst/>
+                        <a:latin typeface="等线" panose="02010600030101010101" pitchFamily="2" charset="-122"/>
+                        <a:ea typeface="等线" panose="02010600030101010101" pitchFamily="2" charset="-122"/>
+                        <a:cs typeface="Times New Roman" panose="02020603050405020304" pitchFamily="18" charset="0"/>
+                      </a:endParaRPr>
+                    </a:p>
+                  </a:txBody>
+                  <a:tcPr marL="68580" marR="68580" marT="0" marB="0" anchor="ctr">
+                    <a:lnL>
+                      <a:noFill/>
+                    </a:lnL>
+                    <a:lnR>
+                      <a:noFill/>
+                    </a:lnR>
+                    <a:lnT w="12700" cap="flat" cmpd="sng" algn="ctr">
+                      <a:solidFill>
+                        <a:srgbClr val="000000"/>
+                      </a:solidFill>
+                      <a:prstDash val="solid"/>
+                      <a:round/>
+                      <a:headEnd type="none" w="med" len="med"/>
+                      <a:tailEnd type="none" w="med" len="med"/>
+                    </a:lnT>
+                    <a:lnB w="12700" cap="flat" cmpd="sng" algn="ctr">
+                      <a:solidFill>
+                        <a:srgbClr val="000000"/>
+                      </a:solidFill>
+                      <a:prstDash val="solid"/>
+                      <a:round/>
+                      <a:headEnd type="none" w="med" len="med"/>
+                      <a:tailEnd type="none" w="med" len="med"/>
+                    </a:lnB>
+                    <a:noFill/>
+                  </a:tcPr>
+                </a:tc>
+                <a:tc>
+                  <a:txBody>
+                    <a:bodyPr/>
+                    <a:lstStyle/>
+                    <a:p>
+                      <a:pPr algn="ctr"/>
+                      <a:r>
+                        <a:rPr lang="zh-CN" sz="1600" kern="100">
+                          <a:effectLst/>
+                          <a:latin typeface="等线" panose="02010600030101010101" pitchFamily="2" charset="-122"/>
+                          <a:ea typeface="等线" panose="02010600030101010101" pitchFamily="2" charset="-122"/>
+                          <a:cs typeface="Times New Roman" panose="02020603050405020304" pitchFamily="18" charset="0"/>
+                        </a:rPr>
+                        <a:t>比例</a:t>
+                      </a:r>
+                    </a:p>
+                  </a:txBody>
+                  <a:tcPr marL="68580" marR="68580" marT="0" marB="0" anchor="ctr">
+                    <a:lnL>
+                      <a:noFill/>
+                    </a:lnL>
+                    <a:lnR>
+                      <a:noFill/>
+                    </a:lnR>
+                    <a:lnT w="12700" cap="flat" cmpd="sng" algn="ctr">
+                      <a:solidFill>
+                        <a:srgbClr val="000000"/>
+                      </a:solidFill>
+                      <a:prstDash val="solid"/>
+                      <a:round/>
+                      <a:headEnd type="none" w="med" len="med"/>
+                      <a:tailEnd type="none" w="med" len="med"/>
+                    </a:lnT>
+                    <a:lnB w="12700" cap="flat" cmpd="sng" algn="ctr">
+                      <a:solidFill>
+                        <a:srgbClr val="000000"/>
+                      </a:solidFill>
+                      <a:prstDash val="solid"/>
+                      <a:round/>
+                      <a:headEnd type="none" w="med" len="med"/>
+                      <a:tailEnd type="none" w="med" len="med"/>
+                    </a:lnB>
+                    <a:noFill/>
+                  </a:tcPr>
+                </a:tc>
+                <a:tc>
+                  <a:txBody>
+                    <a:bodyPr/>
+                    <a:lstStyle/>
+                    <a:p>
+                      <a:pPr algn="ctr"/>
+                      <a:r>
+                        <a:rPr lang="zh-CN" sz="1600" kern="100">
+                          <a:effectLst/>
+                          <a:latin typeface="等线" panose="02010600030101010101" pitchFamily="2" charset="-122"/>
+                          <a:ea typeface="等线" panose="02010600030101010101" pitchFamily="2" charset="-122"/>
+                          <a:cs typeface="Times New Roman" panose="02020603050405020304" pitchFamily="18" charset="0"/>
+                        </a:rPr>
+                        <a:t>合成方法</a:t>
+                      </a:r>
+                    </a:p>
+                  </a:txBody>
+                  <a:tcPr marL="68580" marR="68580" marT="0" marB="0" anchor="ctr">
+                    <a:lnL>
+                      <a:noFill/>
+                    </a:lnL>
+                    <a:lnR>
+                      <a:noFill/>
+                    </a:lnR>
+                    <a:lnT w="12700" cap="flat" cmpd="sng" algn="ctr">
+                      <a:solidFill>
+                        <a:srgbClr val="000000"/>
+                      </a:solidFill>
+                      <a:prstDash val="solid"/>
+                      <a:round/>
+                      <a:headEnd type="none" w="med" len="med"/>
+                      <a:tailEnd type="none" w="med" len="med"/>
+                    </a:lnT>
+                    <a:lnB w="12700" cap="flat" cmpd="sng" algn="ctr">
+                      <a:solidFill>
+                        <a:srgbClr val="000000"/>
+                      </a:solidFill>
+                      <a:prstDash val="solid"/>
+                      <a:round/>
+                      <a:headEnd type="none" w="med" len="med"/>
+                      <a:tailEnd type="none" w="med" len="med"/>
+                    </a:lnB>
+                    <a:noFill/>
+                  </a:tcPr>
+                </a:tc>
+                <a:tc>
+                  <a:txBody>
+                    <a:bodyPr/>
+                    <a:lstStyle/>
+                    <a:p>
+                      <a:pPr algn="ctr"/>
+                      <a:r>
+                        <a:rPr lang="zh-CN" altLang="en-US" sz="1600" kern="100" dirty="0">
+                          <a:effectLst/>
+                          <a:latin typeface="等线" panose="02010600030101010101" pitchFamily="2" charset="-122"/>
+                          <a:ea typeface="+mn-ea"/>
+                          <a:cs typeface="Times New Roman" panose="02020603050405020304" pitchFamily="18" charset="0"/>
+                        </a:rPr>
+                        <a:t>样品</a:t>
+                      </a:r>
+                      <a:endParaRPr lang="zh-CN" sz="1600" kern="100" dirty="0">
+                        <a:effectLst/>
+                        <a:latin typeface="等线" panose="02010600030101010101" pitchFamily="2" charset="-122"/>
+                        <a:ea typeface="等线" panose="02010600030101010101" pitchFamily="2" charset="-122"/>
+                        <a:cs typeface="Times New Roman" panose="02020603050405020304" pitchFamily="18" charset="0"/>
+                      </a:endParaRPr>
+                    </a:p>
+                  </a:txBody>
+                  <a:tcPr marL="68580" marR="68580" marT="0" marB="0" anchor="ctr">
+                    <a:lnL>
+                      <a:noFill/>
+                    </a:lnL>
+                    <a:lnR>
+                      <a:noFill/>
+                    </a:lnR>
+                    <a:lnT w="12700" cap="flat" cmpd="sng" algn="ctr">
+                      <a:solidFill>
+                        <a:srgbClr val="000000"/>
+                      </a:solidFill>
+                      <a:prstDash val="solid"/>
+                      <a:round/>
+                      <a:headEnd type="none" w="med" len="med"/>
+                      <a:tailEnd type="none" w="med" len="med"/>
+                    </a:lnT>
+                    <a:lnB w="12700" cap="flat" cmpd="sng" algn="ctr">
+                      <a:solidFill>
+                        <a:srgbClr val="000000"/>
+                      </a:solidFill>
+                      <a:prstDash val="solid"/>
+                      <a:round/>
+                      <a:headEnd type="none" w="med" len="med"/>
+                      <a:tailEnd type="none" w="med" len="med"/>
+                    </a:lnB>
+                    <a:noFill/>
+                  </a:tcPr>
+                </a:tc>
+                <a:tc>
+                  <a:txBody>
+                    <a:bodyPr/>
+                    <a:lstStyle/>
+                    <a:p>
+                      <a:pPr algn="ctr"/>
+                      <a:r>
+                        <a:rPr lang="en-US" altLang="zh-CN" sz="1600" kern="100" dirty="0" err="1">
+                          <a:effectLst/>
+                          <a:latin typeface="等线" panose="02010600030101010101" pitchFamily="2" charset="-122"/>
+                          <a:ea typeface="等线" panose="02010600030101010101" pitchFamily="2" charset="-122"/>
+                          <a:cs typeface="Times New Roman" panose="02020603050405020304" pitchFamily="18" charset="0"/>
+                        </a:rPr>
+                        <a:t>xrd</a:t>
+                      </a:r>
+                      <a:endParaRPr lang="zh-CN" sz="1600" kern="100" dirty="0">
+                        <a:effectLst/>
+                        <a:latin typeface="等线" panose="02010600030101010101" pitchFamily="2" charset="-122"/>
+                        <a:ea typeface="等线" panose="02010600030101010101" pitchFamily="2" charset="-122"/>
+                        <a:cs typeface="Times New Roman" panose="02020603050405020304" pitchFamily="18" charset="0"/>
+                      </a:endParaRPr>
+                    </a:p>
+                  </a:txBody>
+                  <a:tcPr marL="68580" marR="68580" marT="0" marB="0" anchor="ctr">
+                    <a:lnL>
+                      <a:noFill/>
+                    </a:lnL>
+                    <a:lnR>
+                      <a:noFill/>
+                    </a:lnR>
+                    <a:lnT w="12700" cap="flat" cmpd="sng" algn="ctr">
+                      <a:solidFill>
+                        <a:srgbClr val="000000"/>
+                      </a:solidFill>
+                      <a:prstDash val="solid"/>
+                      <a:round/>
+                      <a:headEnd type="none" w="med" len="med"/>
+                      <a:tailEnd type="none" w="med" len="med"/>
+                    </a:lnT>
+                    <a:lnB w="12700" cap="flat" cmpd="sng" algn="ctr">
+                      <a:solidFill>
+                        <a:srgbClr val="000000"/>
+                      </a:solidFill>
+                      <a:prstDash val="solid"/>
+                      <a:round/>
+                      <a:headEnd type="none" w="med" len="med"/>
+                      <a:tailEnd type="none" w="med" len="med"/>
+                    </a:lnB>
+                    <a:noFill/>
+                  </a:tcPr>
+                </a:tc>
+                <a:extLst>
+                  <a:ext uri="{0D108BD9-81ED-4DB2-BD59-A6C34878D82A}">
+                    <a16:rowId xmlns:a16="http://schemas.microsoft.com/office/drawing/2014/main" val="2203382841"/>
+                  </a:ext>
+                </a:extLst>
+              </a:tr>
+              <a:tr h="1029352">
+                <a:tc>
+                  <a:txBody>
+                    <a:bodyPr/>
+                    <a:lstStyle/>
+                    <a:p>
+                      <a:pPr algn="ctr"/>
+                      <a:r>
+                        <a:rPr lang="en-US" sz="1600" kern="100" dirty="0">
+                          <a:effectLst/>
+                          <a:latin typeface="等线" panose="02010600030101010101" pitchFamily="2" charset="-122"/>
+                          <a:ea typeface="等线" panose="02010600030101010101" pitchFamily="2" charset="-122"/>
+                          <a:cs typeface="Times New Roman" panose="02020603050405020304" pitchFamily="18" charset="0"/>
+                        </a:rPr>
+                        <a:t>24108010</a:t>
+                      </a:r>
+                      <a:endParaRPr lang="zh-CN" sz="1600" kern="100" dirty="0">
+                        <a:effectLst/>
+                        <a:latin typeface="等线" panose="02010600030101010101" pitchFamily="2" charset="-122"/>
+                        <a:ea typeface="等线" panose="02010600030101010101" pitchFamily="2" charset="-122"/>
+                        <a:cs typeface="Times New Roman" panose="02020603050405020304" pitchFamily="18" charset="0"/>
+                      </a:endParaRPr>
+                    </a:p>
+                  </a:txBody>
+                  <a:tcPr marL="68580" marR="68580" marT="0" marB="0" anchor="ctr">
+                    <a:lnL>
+                      <a:noFill/>
+                    </a:lnL>
+                    <a:lnR>
+                      <a:noFill/>
+                    </a:lnR>
+                    <a:lnT w="12700" cap="flat" cmpd="sng" algn="ctr">
+                      <a:solidFill>
+                        <a:srgbClr val="000000"/>
+                      </a:solidFill>
+                      <a:prstDash val="solid"/>
+                      <a:round/>
+                      <a:headEnd type="none" w="med" len="med"/>
+                      <a:tailEnd type="none" w="med" len="med"/>
+                    </a:lnT>
+                    <a:lnB w="12700" cap="flat" cmpd="sng" algn="ctr">
+                      <a:solidFill>
+                        <a:srgbClr val="000000"/>
+                      </a:solidFill>
+                      <a:prstDash val="solid"/>
+                      <a:round/>
+                      <a:headEnd type="none" w="med" len="med"/>
+                      <a:tailEnd type="none" w="med" len="med"/>
+                    </a:lnB>
+                    <a:noFill/>
+                  </a:tcPr>
+                </a:tc>
+                <a:tc>
+                  <a:txBody>
+                    <a:bodyPr/>
+                    <a:lstStyle/>
+                    <a:p>
+                      <a:pPr algn="ctr"/>
+                      <a:r>
+                        <a:rPr lang="zh-CN" altLang="en-US" sz="1600" kern="100" dirty="0">
+                          <a:effectLst/>
+                          <a:latin typeface="等线" panose="02010600030101010101" pitchFamily="2" charset="-122"/>
+                          <a:ea typeface="+mn-ea"/>
+                          <a:cs typeface="Times New Roman" panose="02020603050405020304" pitchFamily="18" charset="0"/>
+                        </a:rPr>
+                        <a:t>麦克林</a:t>
+                      </a:r>
+                      <a:r>
+                        <a:rPr lang="en-US" altLang="zh-CN" sz="1600" kern="100" dirty="0">
+                          <a:effectLst/>
+                          <a:latin typeface="等线" panose="02010600030101010101" pitchFamily="2" charset="-122"/>
+                          <a:ea typeface="+mn-ea"/>
+                          <a:cs typeface="Times New Roman" panose="02020603050405020304" pitchFamily="18" charset="0"/>
+                        </a:rPr>
+                        <a:t>-99%-2.5kg</a:t>
+                      </a:r>
+                      <a:endParaRPr lang="zh-CN" altLang="zh-CN" sz="1600" kern="100" dirty="0">
+                        <a:effectLst/>
+                        <a:latin typeface="等线" panose="02010600030101010101" pitchFamily="2" charset="-122"/>
+                        <a:ea typeface="+mn-ea"/>
+                        <a:cs typeface="Times New Roman" panose="02020603050405020304" pitchFamily="18" charset="0"/>
+                      </a:endParaRPr>
+                    </a:p>
+                  </a:txBody>
+                  <a:tcPr marL="68580" marR="68580" marT="0" marB="0" anchor="ctr">
+                    <a:lnL>
+                      <a:noFill/>
+                    </a:lnL>
+                    <a:lnR>
+                      <a:noFill/>
+                    </a:lnR>
+                    <a:lnT w="12700" cap="flat" cmpd="sng" algn="ctr">
+                      <a:solidFill>
+                        <a:srgbClr val="000000"/>
+                      </a:solidFill>
+                      <a:prstDash val="solid"/>
+                      <a:round/>
+                      <a:headEnd type="none" w="med" len="med"/>
+                      <a:tailEnd type="none" w="med" len="med"/>
+                    </a:lnT>
+                    <a:lnB w="12700" cap="flat" cmpd="sng" algn="ctr">
+                      <a:solidFill>
+                        <a:srgbClr val="000000"/>
+                      </a:solidFill>
+                      <a:prstDash val="solid"/>
+                      <a:round/>
+                      <a:headEnd type="none" w="med" len="med"/>
+                      <a:tailEnd type="none" w="med" len="med"/>
+                    </a:lnB>
+                    <a:noFill/>
+                  </a:tcPr>
+                </a:tc>
+                <a:tc>
+                  <a:txBody>
+                    <a:bodyPr/>
+                    <a:lstStyle/>
+                    <a:p>
+                      <a:pPr algn="ctr"/>
+                      <a:r>
+                        <a:rPr lang="zh-CN" altLang="en-US" sz="1600" kern="100" dirty="0">
+                          <a:effectLst/>
+                          <a:latin typeface="等线" panose="02010600030101010101" pitchFamily="2" charset="-122"/>
+                          <a:ea typeface="等线" panose="02010600030101010101" pitchFamily="2" charset="-122"/>
+                          <a:cs typeface="Times New Roman" panose="02020603050405020304" pitchFamily="18" charset="0"/>
+                        </a:rPr>
+                        <a:t>阿拉丁</a:t>
+                      </a:r>
+                      <a:r>
+                        <a:rPr lang="en-US" altLang="zh-CN" sz="1600" kern="100" dirty="0">
+                          <a:effectLst/>
+                          <a:latin typeface="等线" panose="02010600030101010101" pitchFamily="2" charset="-122"/>
+                          <a:ea typeface="等线" panose="02010600030101010101" pitchFamily="2" charset="-122"/>
+                          <a:cs typeface="Times New Roman" panose="02020603050405020304" pitchFamily="18" charset="0"/>
+                        </a:rPr>
+                        <a:t>-99.5%-</a:t>
+                      </a:r>
+                      <a:r>
+                        <a:rPr lang="zh-CN" altLang="en-US" sz="1600" kern="100" dirty="0">
+                          <a:effectLst/>
+                          <a:latin typeface="等线" panose="02010600030101010101" pitchFamily="2" charset="-122"/>
+                          <a:ea typeface="等线" panose="02010600030101010101" pitchFamily="2" charset="-122"/>
+                          <a:cs typeface="Times New Roman" panose="02020603050405020304" pitchFamily="18" charset="0"/>
+                        </a:rPr>
+                        <a:t>大桶</a:t>
+                      </a:r>
+                      <a:endParaRPr lang="zh-CN" sz="1600" kern="100" dirty="0">
+                        <a:effectLst/>
+                        <a:latin typeface="等线" panose="02010600030101010101" pitchFamily="2" charset="-122"/>
+                        <a:ea typeface="等线" panose="02010600030101010101" pitchFamily="2" charset="-122"/>
+                        <a:cs typeface="Times New Roman" panose="02020603050405020304" pitchFamily="18" charset="0"/>
+                      </a:endParaRPr>
+                    </a:p>
+                  </a:txBody>
+                  <a:tcPr marL="68580" marR="68580" marT="0" marB="0" anchor="ctr">
+                    <a:lnL>
+                      <a:noFill/>
+                    </a:lnL>
+                    <a:lnR>
+                      <a:noFill/>
+                    </a:lnR>
+                    <a:lnT w="12700" cap="flat" cmpd="sng" algn="ctr">
+                      <a:solidFill>
+                        <a:srgbClr val="000000"/>
+                      </a:solidFill>
+                      <a:prstDash val="solid"/>
+                      <a:round/>
+                      <a:headEnd type="none" w="med" len="med"/>
+                      <a:tailEnd type="none" w="med" len="med"/>
+                    </a:lnT>
+                    <a:lnB w="12700" cap="flat" cmpd="sng" algn="ctr">
+                      <a:solidFill>
+                        <a:srgbClr val="000000"/>
+                      </a:solidFill>
+                      <a:prstDash val="solid"/>
+                      <a:round/>
+                      <a:headEnd type="none" w="med" len="med"/>
+                      <a:tailEnd type="none" w="med" len="med"/>
+                    </a:lnB>
+                    <a:noFill/>
+                  </a:tcPr>
+                </a:tc>
+                <a:tc>
+                  <a:txBody>
+                    <a:bodyPr/>
+                    <a:lstStyle/>
+                    <a:p>
+                      <a:pPr algn="ctr"/>
+                      <a:r>
+                        <a:rPr lang="zh-CN" altLang="en-US" sz="1600" kern="100" dirty="0">
+                          <a:effectLst/>
+                          <a:latin typeface="等线" panose="02010600030101010101" pitchFamily="2" charset="-122"/>
+                          <a:ea typeface="等线" panose="02010600030101010101" pitchFamily="2" charset="-122"/>
+                          <a:cs typeface="Times New Roman" panose="02020603050405020304" pitchFamily="18" charset="0"/>
+                        </a:rPr>
+                        <a:t>迈瑞尔</a:t>
+                      </a:r>
+                      <a:r>
+                        <a:rPr lang="en-US" altLang="zh-CN" sz="1600" kern="100" dirty="0">
+                          <a:effectLst/>
+                          <a:latin typeface="等线" panose="02010600030101010101" pitchFamily="2" charset="-122"/>
+                          <a:ea typeface="等线" panose="02010600030101010101" pitchFamily="2" charset="-122"/>
+                          <a:cs typeface="Times New Roman" panose="02020603050405020304" pitchFamily="18" charset="0"/>
+                        </a:rPr>
+                        <a:t>-57%-500ml</a:t>
+                      </a:r>
+                      <a:endParaRPr lang="zh-CN" sz="1600" kern="100" dirty="0">
+                        <a:effectLst/>
+                        <a:latin typeface="等线" panose="02010600030101010101" pitchFamily="2" charset="-122"/>
+                        <a:ea typeface="等线" panose="02010600030101010101" pitchFamily="2" charset="-122"/>
+                        <a:cs typeface="Times New Roman" panose="02020603050405020304" pitchFamily="18" charset="0"/>
+                      </a:endParaRPr>
+                    </a:p>
+                  </a:txBody>
+                  <a:tcPr marL="68580" marR="68580" marT="0" marB="0" anchor="ctr">
+                    <a:lnL>
+                      <a:noFill/>
+                    </a:lnL>
+                    <a:lnR>
+                      <a:noFill/>
+                    </a:lnR>
+                    <a:lnT w="12700" cap="flat" cmpd="sng" algn="ctr">
+                      <a:solidFill>
+                        <a:srgbClr val="000000"/>
+                      </a:solidFill>
+                      <a:prstDash val="solid"/>
+                      <a:round/>
+                      <a:headEnd type="none" w="med" len="med"/>
+                      <a:tailEnd type="none" w="med" len="med"/>
+                    </a:lnT>
+                    <a:lnB w="12700" cap="flat" cmpd="sng" algn="ctr">
+                      <a:solidFill>
+                        <a:srgbClr val="000000"/>
+                      </a:solidFill>
+                      <a:prstDash val="solid"/>
+                      <a:round/>
+                      <a:headEnd type="none" w="med" len="med"/>
+                      <a:tailEnd type="none" w="med" len="med"/>
+                    </a:lnB>
+                    <a:noFill/>
+                  </a:tcPr>
+                </a:tc>
+                <a:tc>
+                  <a:txBody>
+                    <a:bodyPr/>
+                    <a:lstStyle/>
+                    <a:p>
+                      <a:pPr algn="ctr"/>
+                      <a:r>
+                        <a:rPr lang="en-US" altLang="zh-CN" sz="1600" kern="100" dirty="0">
+                          <a:effectLst/>
+                          <a:latin typeface="等线" panose="02010600030101010101" pitchFamily="2" charset="-122"/>
+                          <a:ea typeface="+mn-ea"/>
+                          <a:cs typeface="Times New Roman" panose="02020603050405020304" pitchFamily="18" charset="0"/>
+                        </a:rPr>
+                        <a:t>1</a:t>
+                      </a:r>
+                      <a:r>
+                        <a:rPr lang="zh-CN" altLang="en-US" sz="1600" kern="100" dirty="0">
+                          <a:effectLst/>
+                          <a:latin typeface="等线" panose="02010600030101010101" pitchFamily="2" charset="-122"/>
+                          <a:ea typeface="+mn-ea"/>
+                          <a:cs typeface="Times New Roman" panose="02020603050405020304" pitchFamily="18" charset="0"/>
+                        </a:rPr>
+                        <a:t>：</a:t>
+                      </a:r>
+                      <a:r>
+                        <a:rPr lang="en-US" altLang="zh-CN" sz="1600" kern="100" dirty="0">
+                          <a:effectLst/>
+                          <a:latin typeface="等线" panose="02010600030101010101" pitchFamily="2" charset="-122"/>
+                          <a:ea typeface="+mn-ea"/>
+                          <a:cs typeface="Times New Roman" panose="02020603050405020304" pitchFamily="18" charset="0"/>
+                        </a:rPr>
+                        <a:t>1</a:t>
+                      </a:r>
+                      <a:r>
+                        <a:rPr lang="zh-CN" altLang="en-US" sz="1600" kern="100" dirty="0">
+                          <a:effectLst/>
+                          <a:latin typeface="等线" panose="02010600030101010101" pitchFamily="2" charset="-122"/>
+                          <a:ea typeface="+mn-ea"/>
+                          <a:cs typeface="Times New Roman" panose="02020603050405020304" pitchFamily="18" charset="0"/>
+                        </a:rPr>
+                        <a:t>：</a:t>
+                      </a:r>
+                      <a:r>
+                        <a:rPr lang="en-US" altLang="zh-CN" sz="1600" kern="100" dirty="0">
+                          <a:effectLst/>
+                          <a:latin typeface="等线" panose="02010600030101010101" pitchFamily="2" charset="-122"/>
+                          <a:ea typeface="+mn-ea"/>
+                          <a:cs typeface="Times New Roman" panose="02020603050405020304" pitchFamily="18" charset="0"/>
+                        </a:rPr>
+                        <a:t>7</a:t>
+                      </a:r>
+                      <a:endParaRPr lang="zh-CN" altLang="zh-CN" sz="1600" kern="100" dirty="0">
+                        <a:effectLst/>
+                        <a:latin typeface="等线" panose="02010600030101010101" pitchFamily="2" charset="-122"/>
+                        <a:ea typeface="+mn-ea"/>
+                        <a:cs typeface="Times New Roman" panose="02020603050405020304" pitchFamily="18" charset="0"/>
+                      </a:endParaRPr>
+                    </a:p>
+                  </a:txBody>
+                  <a:tcPr marL="68580" marR="68580" marT="0" marB="0" anchor="ctr">
+                    <a:lnL>
+                      <a:noFill/>
+                    </a:lnL>
+                    <a:lnR>
+                      <a:noFill/>
+                    </a:lnR>
+                    <a:lnT w="12700" cap="flat" cmpd="sng" algn="ctr">
+                      <a:solidFill>
+                        <a:srgbClr val="000000"/>
+                      </a:solidFill>
+                      <a:prstDash val="solid"/>
+                      <a:round/>
+                      <a:headEnd type="none" w="med" len="med"/>
+                      <a:tailEnd type="none" w="med" len="med"/>
+                    </a:lnT>
+                    <a:lnB w="12700" cap="flat" cmpd="sng" algn="ctr">
+                      <a:solidFill>
+                        <a:srgbClr val="000000"/>
+                      </a:solidFill>
+                      <a:prstDash val="solid"/>
+                      <a:round/>
+                      <a:headEnd type="none" w="med" len="med"/>
+                      <a:tailEnd type="none" w="med" len="med"/>
+                    </a:lnB>
+                    <a:noFill/>
+                  </a:tcPr>
+                </a:tc>
+                <a:tc>
+                  <a:txBody>
+                    <a:bodyPr/>
+                    <a:lstStyle/>
+                    <a:p>
+                      <a:pPr algn="ctr"/>
+                      <a:r>
+                        <a:rPr lang="zh-CN" altLang="en-US" sz="1600" kern="100" dirty="0">
+                          <a:effectLst/>
+                          <a:latin typeface="等线" panose="02010600030101010101" pitchFamily="2" charset="-122"/>
+                          <a:ea typeface="+mn-ea"/>
+                          <a:cs typeface="Times New Roman" panose="02020603050405020304" pitchFamily="18" charset="0"/>
+                        </a:rPr>
+                        <a:t>常温</a:t>
+                      </a:r>
+                      <a:endParaRPr lang="zh-CN" sz="1600" kern="100" dirty="0">
+                        <a:effectLst/>
+                        <a:latin typeface="等线" panose="02010600030101010101" pitchFamily="2" charset="-122"/>
+                        <a:ea typeface="等线" panose="02010600030101010101" pitchFamily="2" charset="-122"/>
+                        <a:cs typeface="Times New Roman" panose="02020603050405020304" pitchFamily="18" charset="0"/>
+                      </a:endParaRPr>
+                    </a:p>
+                  </a:txBody>
+                  <a:tcPr marL="68580" marR="68580" marT="0" marB="0" anchor="ctr">
+                    <a:lnL>
+                      <a:noFill/>
+                    </a:lnL>
+                    <a:lnR>
+                      <a:noFill/>
+                    </a:lnR>
+                    <a:lnT w="12700" cap="flat" cmpd="sng" algn="ctr">
+                      <a:solidFill>
+                        <a:srgbClr val="000000"/>
+                      </a:solidFill>
+                      <a:prstDash val="solid"/>
+                      <a:round/>
+                      <a:headEnd type="none" w="med" len="med"/>
+                      <a:tailEnd type="none" w="med" len="med"/>
+                    </a:lnT>
+                    <a:lnB w="12700" cap="flat" cmpd="sng" algn="ctr">
+                      <a:solidFill>
+                        <a:srgbClr val="000000"/>
+                      </a:solidFill>
+                      <a:prstDash val="solid"/>
+                      <a:round/>
+                      <a:headEnd type="none" w="med" len="med"/>
+                      <a:tailEnd type="none" w="med" len="med"/>
+                    </a:lnB>
+                    <a:noFill/>
+                  </a:tcPr>
+                </a:tc>
+                <a:tc>
+                  <a:txBody>
+                    <a:bodyPr/>
+                    <a:lstStyle/>
+                    <a:p>
+                      <a:pPr algn="ctr"/>
+                      <a:endParaRPr lang="zh-CN" sz="1600" kern="100" dirty="0">
+                        <a:effectLst/>
+                        <a:latin typeface="等线" panose="02010600030101010101" pitchFamily="2" charset="-122"/>
+                        <a:ea typeface="等线" panose="02010600030101010101" pitchFamily="2" charset="-122"/>
+                        <a:cs typeface="Times New Roman" panose="02020603050405020304" pitchFamily="18" charset="0"/>
+                      </a:endParaRPr>
+                    </a:p>
+                  </a:txBody>
+                  <a:tcPr marL="68580" marR="68580" marT="0" marB="0" anchor="ctr">
+                    <a:lnL>
+                      <a:noFill/>
+                    </a:lnL>
+                    <a:lnR>
+                      <a:noFill/>
+                    </a:lnR>
+                    <a:lnT w="12700" cap="flat" cmpd="sng" algn="ctr">
+                      <a:solidFill>
+                        <a:srgbClr val="000000"/>
+                      </a:solidFill>
+                      <a:prstDash val="solid"/>
+                      <a:round/>
+                      <a:headEnd type="none" w="med" len="med"/>
+                      <a:tailEnd type="none" w="med" len="med"/>
+                    </a:lnT>
+                    <a:lnB w="12700" cap="flat" cmpd="sng" algn="ctr">
+                      <a:solidFill>
+                        <a:srgbClr val="000000"/>
+                      </a:solidFill>
+                      <a:prstDash val="solid"/>
+                      <a:round/>
+                      <a:headEnd type="none" w="med" len="med"/>
+                      <a:tailEnd type="none" w="med" len="med"/>
+                    </a:lnB>
+                    <a:noFill/>
+                  </a:tcPr>
+                </a:tc>
+                <a:tc>
+                  <a:txBody>
+                    <a:bodyPr/>
+                    <a:lstStyle/>
+                    <a:p>
+                      <a:pPr algn="ctr"/>
+                      <a:endParaRPr lang="zh-CN" sz="1600" kern="100" dirty="0">
+                        <a:effectLst/>
+                        <a:latin typeface="等线" panose="02010600030101010101" pitchFamily="2" charset="-122"/>
+                        <a:ea typeface="等线" panose="02010600030101010101" pitchFamily="2" charset="-122"/>
+                        <a:cs typeface="Times New Roman" panose="02020603050405020304" pitchFamily="18" charset="0"/>
+                      </a:endParaRPr>
+                    </a:p>
+                  </a:txBody>
+                  <a:tcPr marL="68580" marR="68580" marT="0" marB="0" anchor="ctr">
+                    <a:lnL>
+                      <a:noFill/>
+                    </a:lnL>
+                    <a:lnR>
+                      <a:noFill/>
+                    </a:lnR>
+                    <a:lnT w="12700" cap="flat" cmpd="sng" algn="ctr">
+                      <a:solidFill>
+                        <a:srgbClr val="000000"/>
+                      </a:solidFill>
+                      <a:prstDash val="solid"/>
+                      <a:round/>
+                      <a:headEnd type="none" w="med" len="med"/>
+                      <a:tailEnd type="none" w="med" len="med"/>
+                    </a:lnT>
+                    <a:lnB w="12700" cap="flat" cmpd="sng" algn="ctr">
+                      <a:solidFill>
+                        <a:srgbClr val="000000"/>
+                      </a:solidFill>
+                      <a:prstDash val="solid"/>
+                      <a:round/>
+                      <a:headEnd type="none" w="med" len="med"/>
+                      <a:tailEnd type="none" w="med" len="med"/>
+                    </a:lnB>
+                    <a:noFill/>
+                  </a:tcPr>
+                </a:tc>
+                <a:extLst>
+                  <a:ext uri="{0D108BD9-81ED-4DB2-BD59-A6C34878D82A}">
+                    <a16:rowId xmlns:a16="http://schemas.microsoft.com/office/drawing/2014/main" val="3038680541"/>
+                  </a:ext>
+                </a:extLst>
+              </a:tr>
+              <a:tr h="1029352">
+                <a:tc>
+                  <a:txBody>
+                    <a:bodyPr/>
+                    <a:lstStyle/>
+                    <a:p>
+                      <a:pPr algn="ctr"/>
+                      <a:r>
+                        <a:rPr lang="en-US" altLang="zh-CN" sz="1600" kern="100" dirty="0">
+                          <a:effectLst/>
+                          <a:latin typeface="等线" panose="02010600030101010101" pitchFamily="2" charset="-122"/>
+                          <a:ea typeface="+mn-ea"/>
+                          <a:cs typeface="Times New Roman" panose="02020603050405020304" pitchFamily="18" charset="0"/>
+                        </a:rPr>
+                        <a:t>24108020</a:t>
+                      </a:r>
+                      <a:endParaRPr lang="zh-CN" altLang="zh-CN" sz="1600" kern="100" dirty="0">
+                        <a:effectLst/>
+                        <a:latin typeface="等线" panose="02010600030101010101" pitchFamily="2" charset="-122"/>
+                        <a:ea typeface="+mn-ea"/>
+                        <a:cs typeface="Times New Roman" panose="02020603050405020304" pitchFamily="18" charset="0"/>
+                      </a:endParaRPr>
+                    </a:p>
+                  </a:txBody>
+                  <a:tcPr marL="68580" marR="68580" marT="0" marB="0" anchor="ctr">
+                    <a:lnL>
+                      <a:noFill/>
+                    </a:lnL>
+                    <a:lnR>
+                      <a:noFill/>
+                    </a:lnR>
+                    <a:lnT w="12700" cap="flat" cmpd="sng" algn="ctr">
+                      <a:solidFill>
+                        <a:srgbClr val="000000"/>
+                      </a:solidFill>
+                      <a:prstDash val="solid"/>
+                      <a:round/>
+                      <a:headEnd type="none" w="med" len="med"/>
+                      <a:tailEnd type="none" w="med" len="med"/>
+                    </a:lnT>
+                    <a:lnB w="12700" cap="flat" cmpd="sng" algn="ctr">
+                      <a:solidFill>
+                        <a:srgbClr val="000000"/>
+                      </a:solidFill>
+                      <a:prstDash val="solid"/>
+                      <a:round/>
+                      <a:headEnd type="none" w="med" len="med"/>
+                      <a:tailEnd type="none" w="med" len="med"/>
+                    </a:lnB>
+                    <a:noFill/>
+                  </a:tcPr>
+                </a:tc>
+                <a:tc>
+                  <a:txBody>
+                    <a:bodyPr/>
+                    <a:lstStyle/>
+                    <a:p>
+                      <a:pPr algn="ctr"/>
+                      <a:r>
+                        <a:rPr lang="zh-CN" altLang="en-US" sz="1600" kern="100" dirty="0">
+                          <a:effectLst/>
+                          <a:latin typeface="等线" panose="02010600030101010101" pitchFamily="2" charset="-122"/>
+                          <a:ea typeface="+mn-ea"/>
+                          <a:cs typeface="Times New Roman" panose="02020603050405020304" pitchFamily="18" charset="0"/>
+                        </a:rPr>
+                        <a:t>麦克林</a:t>
+                      </a:r>
+                      <a:r>
+                        <a:rPr lang="en-US" altLang="zh-CN" sz="1600" kern="100" dirty="0">
+                          <a:effectLst/>
+                          <a:latin typeface="等线" panose="02010600030101010101" pitchFamily="2" charset="-122"/>
+                          <a:ea typeface="+mn-ea"/>
+                          <a:cs typeface="Times New Roman" panose="02020603050405020304" pitchFamily="18" charset="0"/>
+                        </a:rPr>
+                        <a:t>-99%-2.5kg</a:t>
+                      </a:r>
+                      <a:endParaRPr lang="zh-CN" altLang="zh-CN" sz="1600" kern="100" dirty="0">
+                        <a:effectLst/>
+                        <a:latin typeface="等线" panose="02010600030101010101" pitchFamily="2" charset="-122"/>
+                        <a:ea typeface="+mn-ea"/>
+                        <a:cs typeface="Times New Roman" panose="02020603050405020304" pitchFamily="18" charset="0"/>
+                      </a:endParaRPr>
+                    </a:p>
+                  </a:txBody>
+                  <a:tcPr marL="68580" marR="68580" marT="0" marB="0" anchor="ctr">
+                    <a:lnL>
+                      <a:noFill/>
+                    </a:lnL>
+                    <a:lnR>
+                      <a:noFill/>
+                    </a:lnR>
+                    <a:lnT w="12700" cap="flat" cmpd="sng" algn="ctr">
+                      <a:solidFill>
+                        <a:srgbClr val="000000"/>
+                      </a:solidFill>
+                      <a:prstDash val="solid"/>
+                      <a:round/>
+                      <a:headEnd type="none" w="med" len="med"/>
+                      <a:tailEnd type="none" w="med" len="med"/>
+                    </a:lnT>
+                    <a:lnB w="12700" cap="flat" cmpd="sng" algn="ctr">
+                      <a:solidFill>
+                        <a:srgbClr val="000000"/>
+                      </a:solidFill>
+                      <a:prstDash val="solid"/>
+                      <a:round/>
+                      <a:headEnd type="none" w="med" len="med"/>
+                      <a:tailEnd type="none" w="med" len="med"/>
+                    </a:lnB>
+                    <a:noFill/>
+                  </a:tcPr>
+                </a:tc>
+                <a:tc>
+                  <a:txBody>
+                    <a:bodyPr/>
+                    <a:lstStyle/>
+                    <a:p>
+                      <a:pPr algn="ctr"/>
+                      <a:r>
+                        <a:rPr lang="zh-CN" altLang="en-US" sz="1600" kern="100" dirty="0">
+                          <a:effectLst/>
+                          <a:latin typeface="等线" panose="02010600030101010101" pitchFamily="2" charset="-122"/>
+                          <a:ea typeface="等线" panose="02010600030101010101" pitchFamily="2" charset="-122"/>
+                          <a:cs typeface="Times New Roman" panose="02020603050405020304" pitchFamily="18" charset="0"/>
+                        </a:rPr>
+                        <a:t>阿拉丁</a:t>
+                      </a:r>
+                      <a:r>
+                        <a:rPr lang="en-US" altLang="zh-CN" sz="1600" kern="100" dirty="0">
+                          <a:effectLst/>
+                          <a:latin typeface="等线" panose="02010600030101010101" pitchFamily="2" charset="-122"/>
+                          <a:ea typeface="等线" panose="02010600030101010101" pitchFamily="2" charset="-122"/>
+                          <a:cs typeface="Times New Roman" panose="02020603050405020304" pitchFamily="18" charset="0"/>
+                        </a:rPr>
+                        <a:t>-99.5%-</a:t>
+                      </a:r>
+                      <a:r>
+                        <a:rPr lang="zh-CN" altLang="en-US" sz="1600" kern="100" dirty="0">
+                          <a:effectLst/>
+                          <a:latin typeface="等线" panose="02010600030101010101" pitchFamily="2" charset="-122"/>
+                          <a:ea typeface="等线" panose="02010600030101010101" pitchFamily="2" charset="-122"/>
+                          <a:cs typeface="Times New Roman" panose="02020603050405020304" pitchFamily="18" charset="0"/>
+                        </a:rPr>
+                        <a:t>大桶</a:t>
+                      </a:r>
+                      <a:endParaRPr lang="zh-CN" sz="1600" kern="100" dirty="0">
+                        <a:effectLst/>
+                        <a:latin typeface="等线" panose="02010600030101010101" pitchFamily="2" charset="-122"/>
+                        <a:ea typeface="等线" panose="02010600030101010101" pitchFamily="2" charset="-122"/>
+                        <a:cs typeface="Times New Roman" panose="02020603050405020304" pitchFamily="18" charset="0"/>
+                      </a:endParaRPr>
+                    </a:p>
+                  </a:txBody>
+                  <a:tcPr marL="68580" marR="68580" marT="0" marB="0" anchor="ctr">
+                    <a:lnL>
+                      <a:noFill/>
+                    </a:lnL>
+                    <a:lnR>
+                      <a:noFill/>
+                    </a:lnR>
+                    <a:lnT w="12700" cap="flat" cmpd="sng" algn="ctr">
+                      <a:solidFill>
+                        <a:srgbClr val="000000"/>
+                      </a:solidFill>
+                      <a:prstDash val="solid"/>
+                      <a:round/>
+                      <a:headEnd type="none" w="med" len="med"/>
+                      <a:tailEnd type="none" w="med" len="med"/>
+                    </a:lnT>
+                    <a:lnB w="12700" cap="flat" cmpd="sng" algn="ctr">
+                      <a:solidFill>
+                        <a:srgbClr val="000000"/>
+                      </a:solidFill>
+                      <a:prstDash val="solid"/>
+                      <a:round/>
+                      <a:headEnd type="none" w="med" len="med"/>
+                      <a:tailEnd type="none" w="med" len="med"/>
+                    </a:lnB>
+                    <a:noFill/>
+                  </a:tcPr>
+                </a:tc>
+                <a:tc>
+                  <a:txBody>
+                    <a:bodyPr/>
+                    <a:lstStyle/>
+                    <a:p>
+                      <a:pPr algn="ctr"/>
+                      <a:r>
+                        <a:rPr lang="zh-CN" altLang="en-US" sz="1600" kern="100" dirty="0">
+                          <a:effectLst/>
+                          <a:latin typeface="等线" panose="02010600030101010101" pitchFamily="2" charset="-122"/>
+                          <a:ea typeface="等线" panose="02010600030101010101" pitchFamily="2" charset="-122"/>
+                          <a:cs typeface="Times New Roman" panose="02020603050405020304" pitchFamily="18" charset="0"/>
+                        </a:rPr>
+                        <a:t>迈瑞尔</a:t>
+                      </a:r>
+                      <a:r>
+                        <a:rPr lang="en-US" altLang="zh-CN" sz="1600" kern="100" dirty="0">
+                          <a:effectLst/>
+                          <a:latin typeface="等线" panose="02010600030101010101" pitchFamily="2" charset="-122"/>
+                          <a:ea typeface="等线" panose="02010600030101010101" pitchFamily="2" charset="-122"/>
+                          <a:cs typeface="Times New Roman" panose="02020603050405020304" pitchFamily="18" charset="0"/>
+                        </a:rPr>
+                        <a:t>-57%-500ml</a:t>
+                      </a:r>
+                      <a:endParaRPr lang="zh-CN" sz="1600" kern="100" dirty="0">
+                        <a:effectLst/>
+                        <a:latin typeface="等线" panose="02010600030101010101" pitchFamily="2" charset="-122"/>
+                        <a:ea typeface="等线" panose="02010600030101010101" pitchFamily="2" charset="-122"/>
+                        <a:cs typeface="Times New Roman" panose="02020603050405020304" pitchFamily="18" charset="0"/>
+                      </a:endParaRPr>
+                    </a:p>
+                  </a:txBody>
+                  <a:tcPr marL="68580" marR="68580" marT="0" marB="0" anchor="ctr">
+                    <a:lnL>
+                      <a:noFill/>
+                    </a:lnL>
+                    <a:lnR>
+                      <a:noFill/>
+                    </a:lnR>
+                    <a:lnT w="12700" cap="flat" cmpd="sng" algn="ctr">
+                      <a:solidFill>
+                        <a:srgbClr val="000000"/>
+                      </a:solidFill>
+                      <a:prstDash val="solid"/>
+                      <a:round/>
+                      <a:headEnd type="none" w="med" len="med"/>
+                      <a:tailEnd type="none" w="med" len="med"/>
+                    </a:lnT>
+                    <a:lnB w="12700" cap="flat" cmpd="sng" algn="ctr">
+                      <a:solidFill>
+                        <a:srgbClr val="000000"/>
+                      </a:solidFill>
+                      <a:prstDash val="solid"/>
+                      <a:round/>
+                      <a:headEnd type="none" w="med" len="med"/>
+                      <a:tailEnd type="none" w="med" len="med"/>
+                    </a:lnB>
+                    <a:noFill/>
+                  </a:tcPr>
+                </a:tc>
+                <a:tc>
+                  <a:txBody>
+                    <a:bodyPr/>
+                    <a:lstStyle/>
+                    <a:p>
+                      <a:pPr algn="ctr"/>
+                      <a:r>
+                        <a:rPr lang="en-US" altLang="zh-CN" sz="1600" kern="100" dirty="0">
+                          <a:effectLst/>
+                          <a:latin typeface="等线" panose="02010600030101010101" pitchFamily="2" charset="-122"/>
+                          <a:ea typeface="+mn-ea"/>
+                          <a:cs typeface="Times New Roman" panose="02020603050405020304" pitchFamily="18" charset="0"/>
+                        </a:rPr>
+                        <a:t>1.1</a:t>
+                      </a:r>
+                      <a:r>
+                        <a:rPr lang="zh-CN" altLang="en-US" sz="1600" kern="100" dirty="0">
+                          <a:effectLst/>
+                          <a:latin typeface="等线" panose="02010600030101010101" pitchFamily="2" charset="-122"/>
+                          <a:ea typeface="+mn-ea"/>
+                          <a:cs typeface="Times New Roman" panose="02020603050405020304" pitchFamily="18" charset="0"/>
+                        </a:rPr>
+                        <a:t>：</a:t>
+                      </a:r>
+                      <a:r>
+                        <a:rPr lang="en-US" altLang="zh-CN" sz="1600" kern="100" dirty="0">
+                          <a:effectLst/>
+                          <a:latin typeface="等线" panose="02010600030101010101" pitchFamily="2" charset="-122"/>
+                          <a:ea typeface="+mn-ea"/>
+                          <a:cs typeface="Times New Roman" panose="02020603050405020304" pitchFamily="18" charset="0"/>
+                        </a:rPr>
+                        <a:t>1</a:t>
+                      </a:r>
+                      <a:r>
+                        <a:rPr lang="zh-CN" altLang="en-US" sz="1600" kern="100" dirty="0">
+                          <a:effectLst/>
+                          <a:latin typeface="等线" panose="02010600030101010101" pitchFamily="2" charset="-122"/>
+                          <a:ea typeface="+mn-ea"/>
+                          <a:cs typeface="Times New Roman" panose="02020603050405020304" pitchFamily="18" charset="0"/>
+                        </a:rPr>
+                        <a:t>：</a:t>
+                      </a:r>
+                      <a:r>
+                        <a:rPr lang="en-US" altLang="zh-CN" sz="1600" kern="100" dirty="0">
+                          <a:effectLst/>
+                          <a:latin typeface="等线" panose="02010600030101010101" pitchFamily="2" charset="-122"/>
+                          <a:ea typeface="+mn-ea"/>
+                          <a:cs typeface="Times New Roman" panose="02020603050405020304" pitchFamily="18" charset="0"/>
+                        </a:rPr>
+                        <a:t>7</a:t>
+                      </a:r>
+                      <a:endParaRPr lang="zh-CN" altLang="zh-CN" sz="1600" kern="100" dirty="0">
+                        <a:effectLst/>
+                        <a:latin typeface="等线" panose="02010600030101010101" pitchFamily="2" charset="-122"/>
+                        <a:ea typeface="+mn-ea"/>
+                        <a:cs typeface="Times New Roman" panose="02020603050405020304" pitchFamily="18" charset="0"/>
+                      </a:endParaRPr>
+                    </a:p>
+                  </a:txBody>
+                  <a:tcPr marL="68580" marR="68580" marT="0" marB="0" anchor="ctr">
+                    <a:lnL>
+                      <a:noFill/>
+                    </a:lnL>
+                    <a:lnR>
+                      <a:noFill/>
+                    </a:lnR>
+                    <a:lnT w="12700" cap="flat" cmpd="sng" algn="ctr">
+                      <a:solidFill>
+                        <a:srgbClr val="000000"/>
+                      </a:solidFill>
+                      <a:prstDash val="solid"/>
+                      <a:round/>
+                      <a:headEnd type="none" w="med" len="med"/>
+                      <a:tailEnd type="none" w="med" len="med"/>
+                    </a:lnT>
+                    <a:lnB w="12700" cap="flat" cmpd="sng" algn="ctr">
+                      <a:solidFill>
+                        <a:srgbClr val="000000"/>
+                      </a:solidFill>
+                      <a:prstDash val="solid"/>
+                      <a:round/>
+                      <a:headEnd type="none" w="med" len="med"/>
+                      <a:tailEnd type="none" w="med" len="med"/>
+                    </a:lnB>
+                    <a:noFill/>
+                  </a:tcPr>
+                </a:tc>
+                <a:tc>
+                  <a:txBody>
+                    <a:bodyPr/>
+                    <a:lstStyle/>
+                    <a:p>
+                      <a:pPr algn="ctr"/>
+                      <a:r>
+                        <a:rPr lang="zh-CN" altLang="en-US" sz="1600" kern="100" dirty="0">
+                          <a:effectLst/>
+                          <a:latin typeface="等线" panose="02010600030101010101" pitchFamily="2" charset="-122"/>
+                          <a:ea typeface="+mn-ea"/>
+                          <a:cs typeface="Times New Roman" panose="02020603050405020304" pitchFamily="18" charset="0"/>
+                        </a:rPr>
+                        <a:t>常温</a:t>
+                      </a:r>
+                      <a:endParaRPr lang="zh-CN" sz="1600" kern="100" dirty="0">
+                        <a:effectLst/>
+                        <a:latin typeface="等线" panose="02010600030101010101" pitchFamily="2" charset="-122"/>
+                        <a:ea typeface="等线" panose="02010600030101010101" pitchFamily="2" charset="-122"/>
+                        <a:cs typeface="Times New Roman" panose="02020603050405020304" pitchFamily="18" charset="0"/>
+                      </a:endParaRPr>
+                    </a:p>
+                  </a:txBody>
+                  <a:tcPr marL="68580" marR="68580" marT="0" marB="0" anchor="ctr">
+                    <a:lnL>
+                      <a:noFill/>
+                    </a:lnL>
+                    <a:lnR>
+                      <a:noFill/>
+                    </a:lnR>
+                    <a:lnT w="12700" cap="flat" cmpd="sng" algn="ctr">
+                      <a:solidFill>
+                        <a:srgbClr val="000000"/>
+                      </a:solidFill>
+                      <a:prstDash val="solid"/>
+                      <a:round/>
+                      <a:headEnd type="none" w="med" len="med"/>
+                      <a:tailEnd type="none" w="med" len="med"/>
+                    </a:lnT>
+                    <a:lnB w="12700" cap="flat" cmpd="sng" algn="ctr">
+                      <a:solidFill>
+                        <a:srgbClr val="000000"/>
+                      </a:solidFill>
+                      <a:prstDash val="solid"/>
+                      <a:round/>
+                      <a:headEnd type="none" w="med" len="med"/>
+                      <a:tailEnd type="none" w="med" len="med"/>
+                    </a:lnB>
+                    <a:noFill/>
+                  </a:tcPr>
+                </a:tc>
+                <a:tc>
+                  <a:txBody>
+                    <a:bodyPr/>
+                    <a:lstStyle/>
+                    <a:p>
+                      <a:pPr algn="ctr"/>
+                      <a:endParaRPr lang="zh-CN" sz="1600" kern="100" dirty="0">
+                        <a:effectLst/>
+                        <a:latin typeface="等线" panose="02010600030101010101" pitchFamily="2" charset="-122"/>
+                        <a:ea typeface="等线" panose="02010600030101010101" pitchFamily="2" charset="-122"/>
+                        <a:cs typeface="Times New Roman" panose="02020603050405020304" pitchFamily="18" charset="0"/>
+                      </a:endParaRPr>
+                    </a:p>
+                  </a:txBody>
+                  <a:tcPr marL="68580" marR="68580" marT="0" marB="0" anchor="ctr">
+                    <a:lnL>
+                      <a:noFill/>
+                    </a:lnL>
+                    <a:lnR>
+                      <a:noFill/>
+                    </a:lnR>
+                    <a:lnT w="12700" cap="flat" cmpd="sng" algn="ctr">
+                      <a:solidFill>
+                        <a:srgbClr val="000000"/>
+                      </a:solidFill>
+                      <a:prstDash val="solid"/>
+                      <a:round/>
+                      <a:headEnd type="none" w="med" len="med"/>
+                      <a:tailEnd type="none" w="med" len="med"/>
+                    </a:lnT>
+                    <a:lnB w="12700" cap="flat" cmpd="sng" algn="ctr">
+                      <a:solidFill>
+                        <a:srgbClr val="000000"/>
+                      </a:solidFill>
+                      <a:prstDash val="solid"/>
+                      <a:round/>
+                      <a:headEnd type="none" w="med" len="med"/>
+                      <a:tailEnd type="none" w="med" len="med"/>
+                    </a:lnB>
+                    <a:noFill/>
+                  </a:tcPr>
+                </a:tc>
+                <a:tc>
+                  <a:txBody>
+                    <a:bodyPr/>
+                    <a:lstStyle/>
+                    <a:p>
+                      <a:pPr algn="ctr"/>
+                      <a:endParaRPr lang="zh-CN" sz="1600" kern="100" dirty="0">
+                        <a:effectLst/>
+                        <a:latin typeface="等线" panose="02010600030101010101" pitchFamily="2" charset="-122"/>
+                        <a:ea typeface="等线" panose="02010600030101010101" pitchFamily="2" charset="-122"/>
+                        <a:cs typeface="Times New Roman" panose="02020603050405020304" pitchFamily="18" charset="0"/>
+                      </a:endParaRPr>
+                    </a:p>
+                  </a:txBody>
+                  <a:tcPr marL="68580" marR="68580" marT="0" marB="0" anchor="ctr">
+                    <a:lnL>
+                      <a:noFill/>
+                    </a:lnL>
+                    <a:lnR>
+                      <a:noFill/>
+                    </a:lnR>
+                    <a:lnT w="12700" cap="flat" cmpd="sng" algn="ctr">
+                      <a:solidFill>
+                        <a:srgbClr val="000000"/>
+                      </a:solidFill>
+                      <a:prstDash val="solid"/>
+                      <a:round/>
+                      <a:headEnd type="none" w="med" len="med"/>
+                      <a:tailEnd type="none" w="med" len="med"/>
+                    </a:lnT>
+                    <a:lnB w="12700" cap="flat" cmpd="sng" algn="ctr">
+                      <a:solidFill>
+                        <a:srgbClr val="000000"/>
+                      </a:solidFill>
+                      <a:prstDash val="solid"/>
+                      <a:round/>
+                      <a:headEnd type="none" w="med" len="med"/>
+                      <a:tailEnd type="none" w="med" len="med"/>
+                    </a:lnB>
+                    <a:noFill/>
+                  </a:tcPr>
+                </a:tc>
+                <a:extLst>
+                  <a:ext uri="{0D108BD9-81ED-4DB2-BD59-A6C34878D82A}">
+                    <a16:rowId xmlns:a16="http://schemas.microsoft.com/office/drawing/2014/main" val="4072324395"/>
+                  </a:ext>
+                </a:extLst>
+              </a:tr>
+              <a:tr h="1029352">
+                <a:tc>
+                  <a:txBody>
+                    <a:bodyPr/>
+                    <a:lstStyle/>
+                    <a:p>
+                      <a:pPr algn="ctr"/>
+                      <a:r>
+                        <a:rPr lang="en-US" altLang="zh-CN" sz="1600" kern="100" dirty="0">
+                          <a:effectLst/>
+                          <a:latin typeface="等线" panose="02010600030101010101" pitchFamily="2" charset="-122"/>
+                          <a:ea typeface="+mn-ea"/>
+                          <a:cs typeface="Times New Roman" panose="02020603050405020304" pitchFamily="18" charset="0"/>
+                        </a:rPr>
+                        <a:t>24108030</a:t>
+                      </a:r>
+                      <a:endParaRPr lang="zh-CN" altLang="zh-CN" sz="1600" kern="100" dirty="0">
+                        <a:effectLst/>
+                        <a:latin typeface="等线" panose="02010600030101010101" pitchFamily="2" charset="-122"/>
+                        <a:ea typeface="+mn-ea"/>
+                        <a:cs typeface="Times New Roman" panose="02020603050405020304" pitchFamily="18" charset="0"/>
+                      </a:endParaRPr>
+                    </a:p>
+                  </a:txBody>
+                  <a:tcPr marL="68580" marR="68580" marT="0" marB="0" anchor="ctr">
+                    <a:lnL>
+                      <a:noFill/>
+                    </a:lnL>
+                    <a:lnR>
+                      <a:noFill/>
+                    </a:lnR>
+                    <a:lnT w="12700" cap="flat" cmpd="sng" algn="ctr">
+                      <a:solidFill>
+                        <a:srgbClr val="000000"/>
+                      </a:solidFill>
+                      <a:prstDash val="solid"/>
+                      <a:round/>
+                      <a:headEnd type="none" w="med" len="med"/>
+                      <a:tailEnd type="none" w="med" len="med"/>
+                    </a:lnT>
+                    <a:lnB w="12700" cap="flat" cmpd="sng" algn="ctr">
+                      <a:solidFill>
+                        <a:srgbClr val="000000"/>
+                      </a:solidFill>
+                      <a:prstDash val="solid"/>
+                      <a:round/>
+                      <a:headEnd type="none" w="med" len="med"/>
+                      <a:tailEnd type="none" w="med" len="med"/>
+                    </a:lnB>
+                    <a:noFill/>
+                  </a:tcPr>
+                </a:tc>
+                <a:tc>
+                  <a:txBody>
+                    <a:bodyPr/>
+                    <a:lstStyle/>
+                    <a:p>
+                      <a:pPr algn="ctr"/>
+                      <a:r>
+                        <a:rPr lang="zh-CN" altLang="en-US" sz="1600" kern="100" dirty="0">
+                          <a:effectLst/>
+                          <a:latin typeface="等线" panose="02010600030101010101" pitchFamily="2" charset="-122"/>
+                          <a:ea typeface="+mn-ea"/>
+                          <a:cs typeface="Times New Roman" panose="02020603050405020304" pitchFamily="18" charset="0"/>
+                        </a:rPr>
+                        <a:t>麦克林</a:t>
+                      </a:r>
+                      <a:r>
+                        <a:rPr lang="en-US" altLang="zh-CN" sz="1600" kern="100" dirty="0">
+                          <a:effectLst/>
+                          <a:latin typeface="等线" panose="02010600030101010101" pitchFamily="2" charset="-122"/>
+                          <a:ea typeface="+mn-ea"/>
+                          <a:cs typeface="Times New Roman" panose="02020603050405020304" pitchFamily="18" charset="0"/>
+                        </a:rPr>
+                        <a:t>-99%-2.5kg</a:t>
+                      </a:r>
+                      <a:endParaRPr lang="zh-CN" altLang="zh-CN" sz="1600" kern="100" dirty="0">
+                        <a:effectLst/>
+                        <a:latin typeface="等线" panose="02010600030101010101" pitchFamily="2" charset="-122"/>
+                        <a:ea typeface="+mn-ea"/>
+                        <a:cs typeface="Times New Roman" panose="02020603050405020304" pitchFamily="18" charset="0"/>
+                      </a:endParaRPr>
+                    </a:p>
+                  </a:txBody>
+                  <a:tcPr marL="68580" marR="68580" marT="0" marB="0" anchor="ctr">
+                    <a:lnL>
+                      <a:noFill/>
+                    </a:lnL>
+                    <a:lnR>
+                      <a:noFill/>
+                    </a:lnR>
+                    <a:lnT w="12700" cap="flat" cmpd="sng" algn="ctr">
+                      <a:solidFill>
+                        <a:srgbClr val="000000"/>
+                      </a:solidFill>
+                      <a:prstDash val="solid"/>
+                      <a:round/>
+                      <a:headEnd type="none" w="med" len="med"/>
+                      <a:tailEnd type="none" w="med" len="med"/>
+                    </a:lnT>
+                    <a:lnB w="12700" cap="flat" cmpd="sng" algn="ctr">
+                      <a:solidFill>
+                        <a:srgbClr val="000000"/>
+                      </a:solidFill>
+                      <a:prstDash val="solid"/>
+                      <a:round/>
+                      <a:headEnd type="none" w="med" len="med"/>
+                      <a:tailEnd type="none" w="med" len="med"/>
+                    </a:lnB>
+                    <a:noFill/>
+                  </a:tcPr>
+                </a:tc>
+                <a:tc>
+                  <a:txBody>
+                    <a:bodyPr/>
+                    <a:lstStyle/>
+                    <a:p>
+                      <a:pPr algn="ctr"/>
+                      <a:r>
+                        <a:rPr lang="zh-CN" altLang="en-US" sz="1600" kern="100" dirty="0">
+                          <a:effectLst/>
+                          <a:latin typeface="等线" panose="02010600030101010101" pitchFamily="2" charset="-122"/>
+                          <a:ea typeface="等线" panose="02010600030101010101" pitchFamily="2" charset="-122"/>
+                          <a:cs typeface="Times New Roman" panose="02020603050405020304" pitchFamily="18" charset="0"/>
+                        </a:rPr>
+                        <a:t>阿拉丁</a:t>
+                      </a:r>
+                      <a:r>
+                        <a:rPr lang="en-US" altLang="zh-CN" sz="1600" kern="100" dirty="0">
+                          <a:effectLst/>
+                          <a:latin typeface="等线" panose="02010600030101010101" pitchFamily="2" charset="-122"/>
+                          <a:ea typeface="等线" panose="02010600030101010101" pitchFamily="2" charset="-122"/>
+                          <a:cs typeface="Times New Roman" panose="02020603050405020304" pitchFamily="18" charset="0"/>
+                        </a:rPr>
+                        <a:t>-99.5%-</a:t>
+                      </a:r>
+                      <a:r>
+                        <a:rPr lang="zh-CN" altLang="en-US" sz="1600" kern="100" dirty="0">
+                          <a:effectLst/>
+                          <a:latin typeface="等线" panose="02010600030101010101" pitchFamily="2" charset="-122"/>
+                          <a:ea typeface="等线" panose="02010600030101010101" pitchFamily="2" charset="-122"/>
+                          <a:cs typeface="Times New Roman" panose="02020603050405020304" pitchFamily="18" charset="0"/>
+                        </a:rPr>
+                        <a:t>大桶</a:t>
+                      </a:r>
+                      <a:endParaRPr lang="zh-CN" sz="1600" kern="100" dirty="0">
+                        <a:effectLst/>
+                        <a:latin typeface="等线" panose="02010600030101010101" pitchFamily="2" charset="-122"/>
+                        <a:ea typeface="等线" panose="02010600030101010101" pitchFamily="2" charset="-122"/>
+                        <a:cs typeface="Times New Roman" panose="02020603050405020304" pitchFamily="18" charset="0"/>
+                      </a:endParaRPr>
+                    </a:p>
+                  </a:txBody>
+                  <a:tcPr marL="68580" marR="68580" marT="0" marB="0" anchor="ctr">
+                    <a:lnL>
+                      <a:noFill/>
+                    </a:lnL>
+                    <a:lnR>
+                      <a:noFill/>
+                    </a:lnR>
+                    <a:lnT w="12700" cap="flat" cmpd="sng" algn="ctr">
+                      <a:solidFill>
+                        <a:srgbClr val="000000"/>
+                      </a:solidFill>
+                      <a:prstDash val="solid"/>
+                      <a:round/>
+                      <a:headEnd type="none" w="med" len="med"/>
+                      <a:tailEnd type="none" w="med" len="med"/>
+                    </a:lnT>
+                    <a:lnB w="12700" cap="flat" cmpd="sng" algn="ctr">
+                      <a:solidFill>
+                        <a:srgbClr val="000000"/>
+                      </a:solidFill>
+                      <a:prstDash val="solid"/>
+                      <a:round/>
+                      <a:headEnd type="none" w="med" len="med"/>
+                      <a:tailEnd type="none" w="med" len="med"/>
+                    </a:lnB>
+                    <a:noFill/>
+                  </a:tcPr>
+                </a:tc>
+                <a:tc>
+                  <a:txBody>
+                    <a:bodyPr/>
+                    <a:lstStyle/>
+                    <a:p>
+                      <a:pPr algn="ctr"/>
+                      <a:r>
+                        <a:rPr lang="zh-CN" altLang="en-US" sz="1600" kern="100" dirty="0">
+                          <a:effectLst/>
+                          <a:latin typeface="等线" panose="02010600030101010101" pitchFamily="2" charset="-122"/>
+                          <a:ea typeface="等线" panose="02010600030101010101" pitchFamily="2" charset="-122"/>
+                          <a:cs typeface="Times New Roman" panose="02020603050405020304" pitchFamily="18" charset="0"/>
+                        </a:rPr>
+                        <a:t>迈瑞尔</a:t>
+                      </a:r>
+                      <a:r>
+                        <a:rPr lang="en-US" altLang="zh-CN" sz="1600" kern="100" dirty="0">
+                          <a:effectLst/>
+                          <a:latin typeface="等线" panose="02010600030101010101" pitchFamily="2" charset="-122"/>
+                          <a:ea typeface="等线" panose="02010600030101010101" pitchFamily="2" charset="-122"/>
+                          <a:cs typeface="Times New Roman" panose="02020603050405020304" pitchFamily="18" charset="0"/>
+                        </a:rPr>
+                        <a:t>-57%-500ml</a:t>
+                      </a:r>
+                      <a:endParaRPr lang="zh-CN" sz="1600" kern="100" dirty="0">
+                        <a:effectLst/>
+                        <a:latin typeface="等线" panose="02010600030101010101" pitchFamily="2" charset="-122"/>
+                        <a:ea typeface="等线" panose="02010600030101010101" pitchFamily="2" charset="-122"/>
+                        <a:cs typeface="Times New Roman" panose="02020603050405020304" pitchFamily="18" charset="0"/>
+                      </a:endParaRPr>
+                    </a:p>
+                  </a:txBody>
+                  <a:tcPr marL="68580" marR="68580" marT="0" marB="0" anchor="ctr">
+                    <a:lnL>
+                      <a:noFill/>
+                    </a:lnL>
+                    <a:lnR>
+                      <a:noFill/>
+                    </a:lnR>
+                    <a:lnT w="12700" cap="flat" cmpd="sng" algn="ctr">
+                      <a:solidFill>
+                        <a:srgbClr val="000000"/>
+                      </a:solidFill>
+                      <a:prstDash val="solid"/>
+                      <a:round/>
+                      <a:headEnd type="none" w="med" len="med"/>
+                      <a:tailEnd type="none" w="med" len="med"/>
+                    </a:lnT>
+                    <a:lnB w="12700" cap="flat" cmpd="sng" algn="ctr">
+                      <a:solidFill>
+                        <a:srgbClr val="000000"/>
+                      </a:solidFill>
+                      <a:prstDash val="solid"/>
+                      <a:round/>
+                      <a:headEnd type="none" w="med" len="med"/>
+                      <a:tailEnd type="none" w="med" len="med"/>
+                    </a:lnB>
+                    <a:noFill/>
+                  </a:tcPr>
+                </a:tc>
+                <a:tc>
+                  <a:txBody>
+                    <a:bodyPr/>
+                    <a:lstStyle/>
+                    <a:p>
+                      <a:pPr algn="ctr"/>
+                      <a:r>
+                        <a:rPr lang="en-US" altLang="zh-CN" sz="1600" kern="100" dirty="0">
+                          <a:effectLst/>
+                          <a:latin typeface="等线" panose="02010600030101010101" pitchFamily="2" charset="-122"/>
+                          <a:ea typeface="+mn-ea"/>
+                          <a:cs typeface="Times New Roman" panose="02020603050405020304" pitchFamily="18" charset="0"/>
+                        </a:rPr>
+                        <a:t>1.2</a:t>
+                      </a:r>
+                      <a:r>
+                        <a:rPr lang="zh-CN" altLang="en-US" sz="1600" kern="100" dirty="0">
+                          <a:effectLst/>
+                          <a:latin typeface="等线" panose="02010600030101010101" pitchFamily="2" charset="-122"/>
+                          <a:ea typeface="+mn-ea"/>
+                          <a:cs typeface="Times New Roman" panose="02020603050405020304" pitchFamily="18" charset="0"/>
+                        </a:rPr>
+                        <a:t>：</a:t>
+                      </a:r>
+                      <a:r>
+                        <a:rPr lang="en-US" altLang="zh-CN" sz="1600" kern="100" dirty="0">
+                          <a:effectLst/>
+                          <a:latin typeface="等线" panose="02010600030101010101" pitchFamily="2" charset="-122"/>
+                          <a:ea typeface="+mn-ea"/>
+                          <a:cs typeface="Times New Roman" panose="02020603050405020304" pitchFamily="18" charset="0"/>
+                        </a:rPr>
+                        <a:t>1</a:t>
+                      </a:r>
+                      <a:r>
+                        <a:rPr lang="zh-CN" altLang="en-US" sz="1600" kern="100" dirty="0">
+                          <a:effectLst/>
+                          <a:latin typeface="等线" panose="02010600030101010101" pitchFamily="2" charset="-122"/>
+                          <a:ea typeface="+mn-ea"/>
+                          <a:cs typeface="Times New Roman" panose="02020603050405020304" pitchFamily="18" charset="0"/>
+                        </a:rPr>
+                        <a:t>：</a:t>
+                      </a:r>
+                      <a:r>
+                        <a:rPr lang="en-US" altLang="zh-CN" sz="1600" kern="100" dirty="0">
+                          <a:effectLst/>
+                          <a:latin typeface="等线" panose="02010600030101010101" pitchFamily="2" charset="-122"/>
+                          <a:ea typeface="+mn-ea"/>
+                          <a:cs typeface="Times New Roman" panose="02020603050405020304" pitchFamily="18" charset="0"/>
+                        </a:rPr>
+                        <a:t>7</a:t>
+                      </a:r>
+                      <a:endParaRPr lang="zh-CN" altLang="zh-CN" sz="1600" kern="100" dirty="0">
+                        <a:effectLst/>
+                        <a:latin typeface="等线" panose="02010600030101010101" pitchFamily="2" charset="-122"/>
+                        <a:ea typeface="+mn-ea"/>
+                        <a:cs typeface="Times New Roman" panose="02020603050405020304" pitchFamily="18" charset="0"/>
+                      </a:endParaRPr>
+                    </a:p>
+                  </a:txBody>
+                  <a:tcPr marL="68580" marR="68580" marT="0" marB="0" anchor="ctr">
+                    <a:lnL>
+                      <a:noFill/>
+                    </a:lnL>
+                    <a:lnR>
+                      <a:noFill/>
+                    </a:lnR>
+                    <a:lnT w="12700" cap="flat" cmpd="sng" algn="ctr">
+                      <a:solidFill>
+                        <a:srgbClr val="000000"/>
+                      </a:solidFill>
+                      <a:prstDash val="solid"/>
+                      <a:round/>
+                      <a:headEnd type="none" w="med" len="med"/>
+                      <a:tailEnd type="none" w="med" len="med"/>
+                    </a:lnT>
+                    <a:lnB w="12700" cap="flat" cmpd="sng" algn="ctr">
+                      <a:solidFill>
+                        <a:srgbClr val="000000"/>
+                      </a:solidFill>
+                      <a:prstDash val="solid"/>
+                      <a:round/>
+                      <a:headEnd type="none" w="med" len="med"/>
+                      <a:tailEnd type="none" w="med" len="med"/>
+                    </a:lnB>
+                    <a:noFill/>
+                  </a:tcPr>
+                </a:tc>
+                <a:tc>
+                  <a:txBody>
+                    <a:bodyPr/>
+                    <a:lstStyle/>
+                    <a:p>
+                      <a:pPr algn="ctr"/>
+                      <a:r>
+                        <a:rPr lang="zh-CN" altLang="en-US" sz="1600" kern="100" dirty="0">
+                          <a:effectLst/>
+                          <a:latin typeface="等线" panose="02010600030101010101" pitchFamily="2" charset="-122"/>
+                          <a:ea typeface="+mn-ea"/>
+                          <a:cs typeface="Times New Roman" panose="02020603050405020304" pitchFamily="18" charset="0"/>
+                        </a:rPr>
+                        <a:t>常温</a:t>
+                      </a:r>
+                      <a:endParaRPr lang="zh-CN" sz="1600" kern="100" dirty="0">
+                        <a:effectLst/>
+                        <a:latin typeface="等线" panose="02010600030101010101" pitchFamily="2" charset="-122"/>
+                        <a:ea typeface="等线" panose="02010600030101010101" pitchFamily="2" charset="-122"/>
+                        <a:cs typeface="Times New Roman" panose="02020603050405020304" pitchFamily="18" charset="0"/>
+                      </a:endParaRPr>
+                    </a:p>
+                  </a:txBody>
+                  <a:tcPr marL="68580" marR="68580" marT="0" marB="0" anchor="ctr">
+                    <a:lnL>
+                      <a:noFill/>
+                    </a:lnL>
+                    <a:lnR>
+                      <a:noFill/>
+                    </a:lnR>
+                    <a:lnT w="12700" cap="flat" cmpd="sng" algn="ctr">
+                      <a:solidFill>
+                        <a:srgbClr val="000000"/>
+                      </a:solidFill>
+                      <a:prstDash val="solid"/>
+                      <a:round/>
+                      <a:headEnd type="none" w="med" len="med"/>
+                      <a:tailEnd type="none" w="med" len="med"/>
+                    </a:lnT>
+                    <a:lnB w="12700" cap="flat" cmpd="sng" algn="ctr">
+                      <a:solidFill>
+                        <a:srgbClr val="000000"/>
+                      </a:solidFill>
+                      <a:prstDash val="solid"/>
+                      <a:round/>
+                      <a:headEnd type="none" w="med" len="med"/>
+                      <a:tailEnd type="none" w="med" len="med"/>
+                    </a:lnB>
+                    <a:noFill/>
+                  </a:tcPr>
+                </a:tc>
+                <a:tc>
+                  <a:txBody>
+                    <a:bodyPr/>
+                    <a:lstStyle/>
+                    <a:p>
+                      <a:pPr algn="ctr"/>
+                      <a:endParaRPr lang="zh-CN" sz="1600" kern="100" dirty="0">
+                        <a:effectLst/>
+                        <a:latin typeface="等线" panose="02010600030101010101" pitchFamily="2" charset="-122"/>
+                        <a:ea typeface="等线" panose="02010600030101010101" pitchFamily="2" charset="-122"/>
+                        <a:cs typeface="Times New Roman" panose="02020603050405020304" pitchFamily="18" charset="0"/>
+                      </a:endParaRPr>
+                    </a:p>
+                  </a:txBody>
+                  <a:tcPr marL="68580" marR="68580" marT="0" marB="0" anchor="ctr">
+                    <a:lnL>
+                      <a:noFill/>
+                    </a:lnL>
+                    <a:lnR>
+                      <a:noFill/>
+                    </a:lnR>
+                    <a:lnT w="12700" cap="flat" cmpd="sng" algn="ctr">
+                      <a:solidFill>
+                        <a:srgbClr val="000000"/>
+                      </a:solidFill>
+                      <a:prstDash val="solid"/>
+                      <a:round/>
+                      <a:headEnd type="none" w="med" len="med"/>
+                      <a:tailEnd type="none" w="med" len="med"/>
+                    </a:lnT>
+                    <a:lnB w="12700" cap="flat" cmpd="sng" algn="ctr">
+                      <a:solidFill>
+                        <a:srgbClr val="000000"/>
+                      </a:solidFill>
+                      <a:prstDash val="solid"/>
+                      <a:round/>
+                      <a:headEnd type="none" w="med" len="med"/>
+                      <a:tailEnd type="none" w="med" len="med"/>
+                    </a:lnB>
+                    <a:noFill/>
+                  </a:tcPr>
+                </a:tc>
+                <a:tc>
+                  <a:txBody>
+                    <a:bodyPr/>
+                    <a:lstStyle/>
+                    <a:p>
+                      <a:pPr algn="ctr"/>
+                      <a:endParaRPr lang="zh-CN" sz="1600" kern="100" dirty="0">
+                        <a:effectLst/>
+                        <a:latin typeface="等线" panose="02010600030101010101" pitchFamily="2" charset="-122"/>
+                        <a:ea typeface="等线" panose="02010600030101010101" pitchFamily="2" charset="-122"/>
+                        <a:cs typeface="Times New Roman" panose="02020603050405020304" pitchFamily="18" charset="0"/>
+                      </a:endParaRPr>
+                    </a:p>
+                  </a:txBody>
+                  <a:tcPr marL="68580" marR="68580" marT="0" marB="0" anchor="ctr">
+                    <a:lnL>
+                      <a:noFill/>
+                    </a:lnL>
+                    <a:lnR>
+                      <a:noFill/>
+                    </a:lnR>
+                    <a:lnT w="12700" cap="flat" cmpd="sng" algn="ctr">
+                      <a:solidFill>
+                        <a:srgbClr val="000000"/>
+                      </a:solidFill>
+                      <a:prstDash val="solid"/>
+                      <a:round/>
+                      <a:headEnd type="none" w="med" len="med"/>
+                      <a:tailEnd type="none" w="med" len="med"/>
+                    </a:lnT>
+                    <a:lnB w="12700" cap="flat" cmpd="sng" algn="ctr">
+                      <a:solidFill>
+                        <a:srgbClr val="000000"/>
+                      </a:solidFill>
+                      <a:prstDash val="solid"/>
+                      <a:round/>
+                      <a:headEnd type="none" w="med" len="med"/>
+                      <a:tailEnd type="none" w="med" len="med"/>
+                    </a:lnB>
+                    <a:noFill/>
+                  </a:tcPr>
+                </a:tc>
+                <a:extLst>
+                  <a:ext uri="{0D108BD9-81ED-4DB2-BD59-A6C34878D82A}">
+                    <a16:rowId xmlns:a16="http://schemas.microsoft.com/office/drawing/2014/main" val="130051924"/>
+                  </a:ext>
+                </a:extLst>
+              </a:tr>
+              <a:tr h="1029352">
+                <a:tc>
+                  <a:txBody>
+                    <a:bodyPr/>
+                    <a:lstStyle/>
+                    <a:p>
+                      <a:pPr algn="ctr"/>
+                      <a:r>
+                        <a:rPr lang="en-US" altLang="zh-CN" sz="1600" kern="100" dirty="0">
+                          <a:effectLst/>
+                          <a:latin typeface="等线" panose="02010600030101010101" pitchFamily="2" charset="-122"/>
+                          <a:ea typeface="+mn-ea"/>
+                          <a:cs typeface="Times New Roman" panose="02020603050405020304" pitchFamily="18" charset="0"/>
+                        </a:rPr>
+                        <a:t>24108040</a:t>
+                      </a:r>
+                      <a:endParaRPr lang="zh-CN" altLang="zh-CN" sz="1600" kern="100" dirty="0">
+                        <a:effectLst/>
+                        <a:latin typeface="等线" panose="02010600030101010101" pitchFamily="2" charset="-122"/>
+                        <a:ea typeface="+mn-ea"/>
+                        <a:cs typeface="Times New Roman" panose="02020603050405020304" pitchFamily="18" charset="0"/>
+                      </a:endParaRPr>
+                    </a:p>
+                  </a:txBody>
+                  <a:tcPr marL="68580" marR="68580" marT="0" marB="0" anchor="ctr">
+                    <a:lnL>
+                      <a:noFill/>
+                    </a:lnL>
+                    <a:lnR>
+                      <a:noFill/>
+                    </a:lnR>
+                    <a:lnT w="12700" cap="flat" cmpd="sng" algn="ctr">
+                      <a:solidFill>
+                        <a:srgbClr val="000000"/>
+                      </a:solidFill>
+                      <a:prstDash val="solid"/>
+                      <a:round/>
+                      <a:headEnd type="none" w="med" len="med"/>
+                      <a:tailEnd type="none" w="med" len="med"/>
+                    </a:lnT>
+                    <a:lnB w="12700" cap="flat" cmpd="sng" algn="ctr">
+                      <a:solidFill>
+                        <a:srgbClr val="000000"/>
+                      </a:solidFill>
+                      <a:prstDash val="solid"/>
+                      <a:round/>
+                      <a:headEnd type="none" w="med" len="med"/>
+                      <a:tailEnd type="none" w="med" len="med"/>
+                    </a:lnB>
+                    <a:noFill/>
+                  </a:tcPr>
+                </a:tc>
+                <a:tc>
+                  <a:txBody>
+                    <a:bodyPr/>
+                    <a:lstStyle/>
+                    <a:p>
+                      <a:pPr algn="ctr"/>
+                      <a:r>
+                        <a:rPr lang="zh-CN" altLang="en-US" sz="1600" kern="100" dirty="0">
+                          <a:effectLst/>
+                          <a:latin typeface="等线" panose="02010600030101010101" pitchFamily="2" charset="-122"/>
+                          <a:ea typeface="+mn-ea"/>
+                          <a:cs typeface="Times New Roman" panose="02020603050405020304" pitchFamily="18" charset="0"/>
+                        </a:rPr>
+                        <a:t>麦克林</a:t>
+                      </a:r>
+                      <a:r>
+                        <a:rPr lang="en-US" altLang="zh-CN" sz="1600" kern="100" dirty="0">
+                          <a:effectLst/>
+                          <a:latin typeface="等线" panose="02010600030101010101" pitchFamily="2" charset="-122"/>
+                          <a:ea typeface="+mn-ea"/>
+                          <a:cs typeface="Times New Roman" panose="02020603050405020304" pitchFamily="18" charset="0"/>
+                        </a:rPr>
+                        <a:t>-99%-2.5kg</a:t>
+                      </a:r>
+                      <a:endParaRPr lang="zh-CN" altLang="zh-CN" sz="1600" kern="100" dirty="0">
+                        <a:effectLst/>
+                        <a:latin typeface="等线" panose="02010600030101010101" pitchFamily="2" charset="-122"/>
+                        <a:ea typeface="+mn-ea"/>
+                        <a:cs typeface="Times New Roman" panose="02020603050405020304" pitchFamily="18" charset="0"/>
+                      </a:endParaRPr>
+                    </a:p>
+                  </a:txBody>
+                  <a:tcPr marL="68580" marR="68580" marT="0" marB="0" anchor="ctr">
+                    <a:lnL>
+                      <a:noFill/>
+                    </a:lnL>
+                    <a:lnR>
+                      <a:noFill/>
+                    </a:lnR>
+                    <a:lnT w="12700" cap="flat" cmpd="sng" algn="ctr">
+                      <a:solidFill>
+                        <a:srgbClr val="000000"/>
+                      </a:solidFill>
+                      <a:prstDash val="solid"/>
+                      <a:round/>
+                      <a:headEnd type="none" w="med" len="med"/>
+                      <a:tailEnd type="none" w="med" len="med"/>
+                    </a:lnT>
+                    <a:lnB w="12700" cap="flat" cmpd="sng" algn="ctr">
+                      <a:solidFill>
+                        <a:srgbClr val="000000"/>
+                      </a:solidFill>
+                      <a:prstDash val="solid"/>
+                      <a:round/>
+                      <a:headEnd type="none" w="med" len="med"/>
+                      <a:tailEnd type="none" w="med" len="med"/>
+                    </a:lnB>
+                    <a:noFill/>
+                  </a:tcPr>
+                </a:tc>
+                <a:tc>
+                  <a:txBody>
+                    <a:bodyPr/>
+                    <a:lstStyle/>
+                    <a:p>
+                      <a:pPr algn="ctr"/>
+                      <a:r>
+                        <a:rPr lang="zh-CN" altLang="en-US" sz="1600" kern="100" dirty="0">
+                          <a:effectLst/>
+                          <a:latin typeface="等线" panose="02010600030101010101" pitchFamily="2" charset="-122"/>
+                          <a:ea typeface="等线" panose="02010600030101010101" pitchFamily="2" charset="-122"/>
+                          <a:cs typeface="Times New Roman" panose="02020603050405020304" pitchFamily="18" charset="0"/>
+                        </a:rPr>
+                        <a:t>阿拉丁</a:t>
+                      </a:r>
+                      <a:r>
+                        <a:rPr lang="en-US" altLang="zh-CN" sz="1600" kern="100" dirty="0">
+                          <a:effectLst/>
+                          <a:latin typeface="等线" panose="02010600030101010101" pitchFamily="2" charset="-122"/>
+                          <a:ea typeface="等线" panose="02010600030101010101" pitchFamily="2" charset="-122"/>
+                          <a:cs typeface="Times New Roman" panose="02020603050405020304" pitchFamily="18" charset="0"/>
+                        </a:rPr>
+                        <a:t>-99.5%-</a:t>
+                      </a:r>
+                      <a:r>
+                        <a:rPr lang="zh-CN" altLang="en-US" sz="1600" kern="100" dirty="0">
+                          <a:effectLst/>
+                          <a:latin typeface="等线" panose="02010600030101010101" pitchFamily="2" charset="-122"/>
+                          <a:ea typeface="等线" panose="02010600030101010101" pitchFamily="2" charset="-122"/>
+                          <a:cs typeface="Times New Roman" panose="02020603050405020304" pitchFamily="18" charset="0"/>
+                        </a:rPr>
+                        <a:t>大桶</a:t>
+                      </a:r>
+                      <a:endParaRPr lang="zh-CN" sz="1600" kern="100" dirty="0">
+                        <a:effectLst/>
+                        <a:latin typeface="等线" panose="02010600030101010101" pitchFamily="2" charset="-122"/>
+                        <a:ea typeface="等线" panose="02010600030101010101" pitchFamily="2" charset="-122"/>
+                        <a:cs typeface="Times New Roman" panose="02020603050405020304" pitchFamily="18" charset="0"/>
+                      </a:endParaRPr>
+                    </a:p>
+                  </a:txBody>
+                  <a:tcPr marL="68580" marR="68580" marT="0" marB="0" anchor="ctr">
+                    <a:lnL>
+                      <a:noFill/>
+                    </a:lnL>
+                    <a:lnR>
+                      <a:noFill/>
+                    </a:lnR>
+                    <a:lnT w="12700" cap="flat" cmpd="sng" algn="ctr">
+                      <a:solidFill>
+                        <a:srgbClr val="000000"/>
+                      </a:solidFill>
+                      <a:prstDash val="solid"/>
+                      <a:round/>
+                      <a:headEnd type="none" w="med" len="med"/>
+                      <a:tailEnd type="none" w="med" len="med"/>
+                    </a:lnT>
+                    <a:lnB w="12700" cap="flat" cmpd="sng" algn="ctr">
+                      <a:solidFill>
+                        <a:srgbClr val="000000"/>
+                      </a:solidFill>
+                      <a:prstDash val="solid"/>
+                      <a:round/>
+                      <a:headEnd type="none" w="med" len="med"/>
+                      <a:tailEnd type="none" w="med" len="med"/>
+                    </a:lnB>
+                    <a:noFill/>
+                  </a:tcPr>
+                </a:tc>
+                <a:tc>
+                  <a:txBody>
+                    <a:bodyPr/>
+                    <a:lstStyle/>
+                    <a:p>
+                      <a:pPr algn="ctr"/>
+                      <a:r>
+                        <a:rPr lang="zh-CN" altLang="en-US" sz="1600" kern="100" dirty="0">
+                          <a:effectLst/>
+                          <a:latin typeface="等线" panose="02010600030101010101" pitchFamily="2" charset="-122"/>
+                          <a:ea typeface="等线" panose="02010600030101010101" pitchFamily="2" charset="-122"/>
+                          <a:cs typeface="Times New Roman" panose="02020603050405020304" pitchFamily="18" charset="0"/>
+                        </a:rPr>
+                        <a:t>迈瑞尔</a:t>
+                      </a:r>
+                      <a:r>
+                        <a:rPr lang="en-US" altLang="zh-CN" sz="1600" kern="100" dirty="0">
+                          <a:effectLst/>
+                          <a:latin typeface="等线" panose="02010600030101010101" pitchFamily="2" charset="-122"/>
+                          <a:ea typeface="等线" panose="02010600030101010101" pitchFamily="2" charset="-122"/>
+                          <a:cs typeface="Times New Roman" panose="02020603050405020304" pitchFamily="18" charset="0"/>
+                        </a:rPr>
+                        <a:t>-57%-500ml</a:t>
+                      </a:r>
+                      <a:endParaRPr lang="zh-CN" sz="1600" kern="100" dirty="0">
+                        <a:effectLst/>
+                        <a:latin typeface="等线" panose="02010600030101010101" pitchFamily="2" charset="-122"/>
+                        <a:ea typeface="等线" panose="02010600030101010101" pitchFamily="2" charset="-122"/>
+                        <a:cs typeface="Times New Roman" panose="02020603050405020304" pitchFamily="18" charset="0"/>
+                      </a:endParaRPr>
+                    </a:p>
+                  </a:txBody>
+                  <a:tcPr marL="68580" marR="68580" marT="0" marB="0" anchor="ctr">
+                    <a:lnL>
+                      <a:noFill/>
+                    </a:lnL>
+                    <a:lnR>
+                      <a:noFill/>
+                    </a:lnR>
+                    <a:lnT w="12700" cap="flat" cmpd="sng" algn="ctr">
+                      <a:solidFill>
+                        <a:srgbClr val="000000"/>
+                      </a:solidFill>
+                      <a:prstDash val="solid"/>
+                      <a:round/>
+                      <a:headEnd type="none" w="med" len="med"/>
+                      <a:tailEnd type="none" w="med" len="med"/>
+                    </a:lnT>
+                    <a:lnB w="12700" cap="flat" cmpd="sng" algn="ctr">
+                      <a:solidFill>
+                        <a:srgbClr val="000000"/>
+                      </a:solidFill>
+                      <a:prstDash val="solid"/>
+                      <a:round/>
+                      <a:headEnd type="none" w="med" len="med"/>
+                      <a:tailEnd type="none" w="med" len="med"/>
+                    </a:lnB>
+                    <a:noFill/>
+                  </a:tcPr>
+                </a:tc>
+                <a:tc>
+                  <a:txBody>
+                    <a:bodyPr/>
+                    <a:lstStyle/>
+                    <a:p>
+                      <a:pPr algn="ctr"/>
+                      <a:r>
+                        <a:rPr lang="en-US" altLang="zh-CN" sz="1600" kern="100" dirty="0">
+                          <a:effectLst/>
+                          <a:latin typeface="等线" panose="02010600030101010101" pitchFamily="2" charset="-122"/>
+                          <a:ea typeface="+mn-ea"/>
+                          <a:cs typeface="Times New Roman" panose="02020603050405020304" pitchFamily="18" charset="0"/>
+                        </a:rPr>
+                        <a:t>1.3</a:t>
+                      </a:r>
+                      <a:r>
+                        <a:rPr lang="zh-CN" altLang="en-US" sz="1600" kern="100" dirty="0">
+                          <a:effectLst/>
+                          <a:latin typeface="等线" panose="02010600030101010101" pitchFamily="2" charset="-122"/>
+                          <a:ea typeface="+mn-ea"/>
+                          <a:cs typeface="Times New Roman" panose="02020603050405020304" pitchFamily="18" charset="0"/>
+                        </a:rPr>
+                        <a:t>：</a:t>
+                      </a:r>
+                      <a:r>
+                        <a:rPr lang="en-US" altLang="zh-CN" sz="1600" kern="100" dirty="0">
+                          <a:effectLst/>
+                          <a:latin typeface="等线" panose="02010600030101010101" pitchFamily="2" charset="-122"/>
+                          <a:ea typeface="+mn-ea"/>
+                          <a:cs typeface="Times New Roman" panose="02020603050405020304" pitchFamily="18" charset="0"/>
+                        </a:rPr>
+                        <a:t>1</a:t>
+                      </a:r>
+                      <a:r>
+                        <a:rPr lang="zh-CN" altLang="en-US" sz="1600" kern="100" dirty="0">
+                          <a:effectLst/>
+                          <a:latin typeface="等线" panose="02010600030101010101" pitchFamily="2" charset="-122"/>
+                          <a:ea typeface="+mn-ea"/>
+                          <a:cs typeface="Times New Roman" panose="02020603050405020304" pitchFamily="18" charset="0"/>
+                        </a:rPr>
+                        <a:t>：</a:t>
+                      </a:r>
+                      <a:r>
+                        <a:rPr lang="en-US" altLang="zh-CN" sz="1600" kern="100" dirty="0">
+                          <a:effectLst/>
+                          <a:latin typeface="等线" panose="02010600030101010101" pitchFamily="2" charset="-122"/>
+                          <a:ea typeface="+mn-ea"/>
+                          <a:cs typeface="Times New Roman" panose="02020603050405020304" pitchFamily="18" charset="0"/>
+                        </a:rPr>
+                        <a:t>7</a:t>
+                      </a:r>
+                      <a:endParaRPr lang="zh-CN" altLang="zh-CN" sz="1600" kern="100" dirty="0">
+                        <a:effectLst/>
+                        <a:latin typeface="等线" panose="02010600030101010101" pitchFamily="2" charset="-122"/>
+                        <a:ea typeface="+mn-ea"/>
+                        <a:cs typeface="Times New Roman" panose="02020603050405020304" pitchFamily="18" charset="0"/>
+                      </a:endParaRPr>
+                    </a:p>
+                  </a:txBody>
+                  <a:tcPr marL="68580" marR="68580" marT="0" marB="0" anchor="ctr">
+                    <a:lnL>
+                      <a:noFill/>
+                    </a:lnL>
+                    <a:lnR>
+                      <a:noFill/>
+                    </a:lnR>
+                    <a:lnT w="12700" cap="flat" cmpd="sng" algn="ctr">
+                      <a:solidFill>
+                        <a:srgbClr val="000000"/>
+                      </a:solidFill>
+                      <a:prstDash val="solid"/>
+                      <a:round/>
+                      <a:headEnd type="none" w="med" len="med"/>
+                      <a:tailEnd type="none" w="med" len="med"/>
+                    </a:lnT>
+                    <a:lnB w="12700" cap="flat" cmpd="sng" algn="ctr">
+                      <a:solidFill>
+                        <a:srgbClr val="000000"/>
+                      </a:solidFill>
+                      <a:prstDash val="solid"/>
+                      <a:round/>
+                      <a:headEnd type="none" w="med" len="med"/>
+                      <a:tailEnd type="none" w="med" len="med"/>
+                    </a:lnB>
+                    <a:noFill/>
+                  </a:tcPr>
+                </a:tc>
+                <a:tc>
+                  <a:txBody>
+                    <a:bodyPr/>
+                    <a:lstStyle/>
+                    <a:p>
+                      <a:pPr algn="ctr"/>
+                      <a:r>
+                        <a:rPr lang="zh-CN" altLang="en-US" sz="1600" kern="100" dirty="0">
+                          <a:effectLst/>
+                          <a:latin typeface="等线" panose="02010600030101010101" pitchFamily="2" charset="-122"/>
+                          <a:ea typeface="+mn-ea"/>
+                          <a:cs typeface="Times New Roman" panose="02020603050405020304" pitchFamily="18" charset="0"/>
+                        </a:rPr>
+                        <a:t>常温</a:t>
+                      </a:r>
+                      <a:endParaRPr lang="zh-CN" sz="1600" kern="100" dirty="0">
+                        <a:effectLst/>
+                        <a:latin typeface="等线" panose="02010600030101010101" pitchFamily="2" charset="-122"/>
+                        <a:ea typeface="等线" panose="02010600030101010101" pitchFamily="2" charset="-122"/>
+                        <a:cs typeface="Times New Roman" panose="02020603050405020304" pitchFamily="18" charset="0"/>
+                      </a:endParaRPr>
+                    </a:p>
+                  </a:txBody>
+                  <a:tcPr marL="68580" marR="68580" marT="0" marB="0" anchor="ctr">
+                    <a:lnL>
+                      <a:noFill/>
+                    </a:lnL>
+                    <a:lnR>
+                      <a:noFill/>
+                    </a:lnR>
+                    <a:lnT w="12700" cap="flat" cmpd="sng" algn="ctr">
+                      <a:solidFill>
+                        <a:srgbClr val="000000"/>
+                      </a:solidFill>
+                      <a:prstDash val="solid"/>
+                      <a:round/>
+                      <a:headEnd type="none" w="med" len="med"/>
+                      <a:tailEnd type="none" w="med" len="med"/>
+                    </a:lnT>
+                    <a:lnB w="12700" cap="flat" cmpd="sng" algn="ctr">
+                      <a:solidFill>
+                        <a:srgbClr val="000000"/>
+                      </a:solidFill>
+                      <a:prstDash val="solid"/>
+                      <a:round/>
+                      <a:headEnd type="none" w="med" len="med"/>
+                      <a:tailEnd type="none" w="med" len="med"/>
+                    </a:lnB>
+                    <a:noFill/>
+                  </a:tcPr>
+                </a:tc>
+                <a:tc>
+                  <a:txBody>
+                    <a:bodyPr/>
+                    <a:lstStyle/>
+                    <a:p>
+                      <a:pPr algn="ctr"/>
+                      <a:endParaRPr lang="zh-CN" sz="1600" kern="100" dirty="0">
+                        <a:effectLst/>
+                        <a:latin typeface="等线" panose="02010600030101010101" pitchFamily="2" charset="-122"/>
+                        <a:ea typeface="等线" panose="02010600030101010101" pitchFamily="2" charset="-122"/>
+                        <a:cs typeface="Times New Roman" panose="02020603050405020304" pitchFamily="18" charset="0"/>
+                      </a:endParaRPr>
+                    </a:p>
+                  </a:txBody>
+                  <a:tcPr marL="68580" marR="68580" marT="0" marB="0" anchor="ctr">
+                    <a:lnL>
+                      <a:noFill/>
+                    </a:lnL>
+                    <a:lnR>
+                      <a:noFill/>
+                    </a:lnR>
+                    <a:lnT w="12700" cap="flat" cmpd="sng" algn="ctr">
+                      <a:solidFill>
+                        <a:srgbClr val="000000"/>
+                      </a:solidFill>
+                      <a:prstDash val="solid"/>
+                      <a:round/>
+                      <a:headEnd type="none" w="med" len="med"/>
+                      <a:tailEnd type="none" w="med" len="med"/>
+                    </a:lnT>
+                    <a:lnB w="12700" cap="flat" cmpd="sng" algn="ctr">
+                      <a:solidFill>
+                        <a:srgbClr val="000000"/>
+                      </a:solidFill>
+                      <a:prstDash val="solid"/>
+                      <a:round/>
+                      <a:headEnd type="none" w="med" len="med"/>
+                      <a:tailEnd type="none" w="med" len="med"/>
+                    </a:lnB>
+                    <a:noFill/>
+                  </a:tcPr>
+                </a:tc>
+                <a:tc>
+                  <a:txBody>
+                    <a:bodyPr/>
+                    <a:lstStyle/>
+                    <a:p>
+                      <a:pPr algn="ctr"/>
+                      <a:endParaRPr lang="zh-CN" sz="1600" kern="100" dirty="0">
+                        <a:effectLst/>
+                        <a:latin typeface="等线" panose="02010600030101010101" pitchFamily="2" charset="-122"/>
+                        <a:ea typeface="等线" panose="02010600030101010101" pitchFamily="2" charset="-122"/>
+                        <a:cs typeface="Times New Roman" panose="02020603050405020304" pitchFamily="18" charset="0"/>
+                      </a:endParaRPr>
+                    </a:p>
+                  </a:txBody>
+                  <a:tcPr marL="68580" marR="68580" marT="0" marB="0" anchor="ctr">
+                    <a:lnL>
+                      <a:noFill/>
+                    </a:lnL>
+                    <a:lnR>
+                      <a:noFill/>
+                    </a:lnR>
+                    <a:lnT w="12700" cap="flat" cmpd="sng" algn="ctr">
+                      <a:solidFill>
+                        <a:srgbClr val="000000"/>
+                      </a:solidFill>
+                      <a:prstDash val="solid"/>
+                      <a:round/>
+                      <a:headEnd type="none" w="med" len="med"/>
+                      <a:tailEnd type="none" w="med" len="med"/>
+                    </a:lnT>
+                    <a:lnB w="12700" cap="flat" cmpd="sng" algn="ctr">
+                      <a:solidFill>
+                        <a:srgbClr val="000000"/>
+                      </a:solidFill>
+                      <a:prstDash val="solid"/>
+                      <a:round/>
+                      <a:headEnd type="none" w="med" len="med"/>
+                      <a:tailEnd type="none" w="med" len="med"/>
+                    </a:lnB>
+                    <a:noFill/>
+                  </a:tcPr>
+                </a:tc>
+                <a:extLst>
+                  <a:ext uri="{0D108BD9-81ED-4DB2-BD59-A6C34878D82A}">
+                    <a16:rowId xmlns:a16="http://schemas.microsoft.com/office/drawing/2014/main" val="3663445581"/>
+                  </a:ext>
+                </a:extLst>
+              </a:tr>
+              <a:tr h="1029352">
+                <a:tc>
+                  <a:txBody>
+                    <a:bodyPr/>
+                    <a:lstStyle/>
+                    <a:p>
+                      <a:pPr algn="ctr"/>
+                      <a:r>
+                        <a:rPr lang="en-US" altLang="zh-CN" sz="1600" kern="100" dirty="0">
+                          <a:effectLst/>
+                          <a:latin typeface="等线" panose="02010600030101010101" pitchFamily="2" charset="-122"/>
+                          <a:ea typeface="+mn-ea"/>
+                          <a:cs typeface="Times New Roman" panose="02020603050405020304" pitchFamily="18" charset="0"/>
+                        </a:rPr>
+                        <a:t>24108050</a:t>
+                      </a:r>
+                      <a:endParaRPr lang="zh-CN" altLang="zh-CN" sz="1600" kern="100" dirty="0">
+                        <a:effectLst/>
+                        <a:latin typeface="等线" panose="02010600030101010101" pitchFamily="2" charset="-122"/>
+                        <a:ea typeface="+mn-ea"/>
+                        <a:cs typeface="Times New Roman" panose="02020603050405020304" pitchFamily="18" charset="0"/>
+                      </a:endParaRPr>
+                    </a:p>
+                  </a:txBody>
+                  <a:tcPr marL="68580" marR="68580" marT="0" marB="0" anchor="ctr">
+                    <a:lnL>
+                      <a:noFill/>
+                    </a:lnL>
+                    <a:lnR>
+                      <a:noFill/>
+                    </a:lnR>
+                    <a:lnT w="12700" cap="flat" cmpd="sng" algn="ctr">
+                      <a:solidFill>
+                        <a:srgbClr val="000000"/>
+                      </a:solidFill>
+                      <a:prstDash val="solid"/>
+                      <a:round/>
+                      <a:headEnd type="none" w="med" len="med"/>
+                      <a:tailEnd type="none" w="med" len="med"/>
+                    </a:lnT>
+                    <a:lnB w="12700" cap="flat" cmpd="sng" algn="ctr">
+                      <a:solidFill>
+                        <a:srgbClr val="000000"/>
+                      </a:solidFill>
+                      <a:prstDash val="solid"/>
+                      <a:round/>
+                      <a:headEnd type="none" w="med" len="med"/>
+                      <a:tailEnd type="none" w="med" len="med"/>
+                    </a:lnB>
+                    <a:noFill/>
+                  </a:tcPr>
+                </a:tc>
+                <a:tc>
+                  <a:txBody>
+                    <a:bodyPr/>
+                    <a:lstStyle/>
+                    <a:p>
+                      <a:pPr algn="ctr"/>
+                      <a:r>
+                        <a:rPr lang="zh-CN" altLang="en-US" sz="1600" kern="100" dirty="0">
+                          <a:effectLst/>
+                          <a:latin typeface="等线" panose="02010600030101010101" pitchFamily="2" charset="-122"/>
+                          <a:ea typeface="+mn-ea"/>
+                          <a:cs typeface="Times New Roman" panose="02020603050405020304" pitchFamily="18" charset="0"/>
+                        </a:rPr>
+                        <a:t>麦克林</a:t>
+                      </a:r>
+                      <a:r>
+                        <a:rPr lang="en-US" altLang="zh-CN" sz="1600" kern="100" dirty="0">
+                          <a:effectLst/>
+                          <a:latin typeface="等线" panose="02010600030101010101" pitchFamily="2" charset="-122"/>
+                          <a:ea typeface="+mn-ea"/>
+                          <a:cs typeface="Times New Roman" panose="02020603050405020304" pitchFamily="18" charset="0"/>
+                        </a:rPr>
+                        <a:t>-99%-2.5kg</a:t>
+                      </a:r>
+                      <a:endParaRPr lang="zh-CN" altLang="zh-CN" sz="1600" kern="100" dirty="0">
+                        <a:effectLst/>
+                        <a:latin typeface="等线" panose="02010600030101010101" pitchFamily="2" charset="-122"/>
+                        <a:ea typeface="+mn-ea"/>
+                        <a:cs typeface="Times New Roman" panose="02020603050405020304" pitchFamily="18" charset="0"/>
+                      </a:endParaRPr>
+                    </a:p>
+                  </a:txBody>
+                  <a:tcPr marL="68580" marR="68580" marT="0" marB="0" anchor="ctr">
+                    <a:lnL>
+                      <a:noFill/>
+                    </a:lnL>
+                    <a:lnR>
+                      <a:noFill/>
+                    </a:lnR>
+                    <a:lnT w="12700" cap="flat" cmpd="sng" algn="ctr">
+                      <a:solidFill>
+                        <a:srgbClr val="000000"/>
+                      </a:solidFill>
+                      <a:prstDash val="solid"/>
+                      <a:round/>
+                      <a:headEnd type="none" w="med" len="med"/>
+                      <a:tailEnd type="none" w="med" len="med"/>
+                    </a:lnT>
+                    <a:lnB w="12700" cap="flat" cmpd="sng" algn="ctr">
+                      <a:solidFill>
+                        <a:srgbClr val="000000"/>
+                      </a:solidFill>
+                      <a:prstDash val="solid"/>
+                      <a:round/>
+                      <a:headEnd type="none" w="med" len="med"/>
+                      <a:tailEnd type="none" w="med" len="med"/>
+                    </a:lnB>
+                    <a:noFill/>
+                  </a:tcPr>
+                </a:tc>
+                <a:tc>
+                  <a:txBody>
+                    <a:bodyPr/>
+                    <a:lstStyle/>
+                    <a:p>
+                      <a:pPr algn="ctr"/>
+                      <a:r>
+                        <a:rPr lang="zh-CN" altLang="en-US" sz="1600" kern="100" dirty="0">
+                          <a:effectLst/>
+                          <a:latin typeface="等线" panose="02010600030101010101" pitchFamily="2" charset="-122"/>
+                          <a:ea typeface="等线" panose="02010600030101010101" pitchFamily="2" charset="-122"/>
+                          <a:cs typeface="Times New Roman" panose="02020603050405020304" pitchFamily="18" charset="0"/>
+                        </a:rPr>
+                        <a:t>阿拉丁</a:t>
+                      </a:r>
+                      <a:r>
+                        <a:rPr lang="en-US" altLang="zh-CN" sz="1600" kern="100" dirty="0">
+                          <a:effectLst/>
+                          <a:latin typeface="等线" panose="02010600030101010101" pitchFamily="2" charset="-122"/>
+                          <a:ea typeface="等线" panose="02010600030101010101" pitchFamily="2" charset="-122"/>
+                          <a:cs typeface="Times New Roman" panose="02020603050405020304" pitchFamily="18" charset="0"/>
+                        </a:rPr>
+                        <a:t>-99.5%-</a:t>
+                      </a:r>
+                      <a:r>
+                        <a:rPr lang="zh-CN" altLang="en-US" sz="1600" kern="100" dirty="0">
+                          <a:effectLst/>
+                          <a:latin typeface="等线" panose="02010600030101010101" pitchFamily="2" charset="-122"/>
+                          <a:ea typeface="等线" panose="02010600030101010101" pitchFamily="2" charset="-122"/>
+                          <a:cs typeface="Times New Roman" panose="02020603050405020304" pitchFamily="18" charset="0"/>
+                        </a:rPr>
+                        <a:t>大桶</a:t>
+                      </a:r>
+                      <a:endParaRPr lang="zh-CN" sz="1600" kern="100" dirty="0">
+                        <a:effectLst/>
+                        <a:latin typeface="等线" panose="02010600030101010101" pitchFamily="2" charset="-122"/>
+                        <a:ea typeface="等线" panose="02010600030101010101" pitchFamily="2" charset="-122"/>
+                        <a:cs typeface="Times New Roman" panose="02020603050405020304" pitchFamily="18" charset="0"/>
+                      </a:endParaRPr>
+                    </a:p>
+                  </a:txBody>
+                  <a:tcPr marL="68580" marR="68580" marT="0" marB="0" anchor="ctr">
+                    <a:lnL>
+                      <a:noFill/>
+                    </a:lnL>
+                    <a:lnR>
+                      <a:noFill/>
+                    </a:lnR>
+                    <a:lnT w="12700" cap="flat" cmpd="sng" algn="ctr">
+                      <a:solidFill>
+                        <a:srgbClr val="000000"/>
+                      </a:solidFill>
+                      <a:prstDash val="solid"/>
+                      <a:round/>
+                      <a:headEnd type="none" w="med" len="med"/>
+                      <a:tailEnd type="none" w="med" len="med"/>
+                    </a:lnT>
+                    <a:lnB w="12700" cap="flat" cmpd="sng" algn="ctr">
+                      <a:solidFill>
+                        <a:srgbClr val="000000"/>
+                      </a:solidFill>
+                      <a:prstDash val="solid"/>
+                      <a:round/>
+                      <a:headEnd type="none" w="med" len="med"/>
+                      <a:tailEnd type="none" w="med" len="med"/>
+                    </a:lnB>
+                    <a:noFill/>
+                  </a:tcPr>
+                </a:tc>
+                <a:tc>
+                  <a:txBody>
+                    <a:bodyPr/>
+                    <a:lstStyle/>
+                    <a:p>
+                      <a:pPr algn="ctr"/>
+                      <a:r>
+                        <a:rPr lang="zh-CN" altLang="en-US" sz="1600" kern="100" dirty="0">
+                          <a:effectLst/>
+                          <a:latin typeface="等线" panose="02010600030101010101" pitchFamily="2" charset="-122"/>
+                          <a:ea typeface="等线" panose="02010600030101010101" pitchFamily="2" charset="-122"/>
+                          <a:cs typeface="Times New Roman" panose="02020603050405020304" pitchFamily="18" charset="0"/>
+                        </a:rPr>
+                        <a:t>迈瑞尔</a:t>
+                      </a:r>
+                      <a:r>
+                        <a:rPr lang="en-US" altLang="zh-CN" sz="1600" kern="100" dirty="0">
+                          <a:effectLst/>
+                          <a:latin typeface="等线" panose="02010600030101010101" pitchFamily="2" charset="-122"/>
+                          <a:ea typeface="等线" panose="02010600030101010101" pitchFamily="2" charset="-122"/>
+                          <a:cs typeface="Times New Roman" panose="02020603050405020304" pitchFamily="18" charset="0"/>
+                        </a:rPr>
+                        <a:t>-57%-500ml</a:t>
+                      </a:r>
+                      <a:endParaRPr lang="zh-CN" sz="1600" kern="100" dirty="0">
+                        <a:effectLst/>
+                        <a:latin typeface="等线" panose="02010600030101010101" pitchFamily="2" charset="-122"/>
+                        <a:ea typeface="等线" panose="02010600030101010101" pitchFamily="2" charset="-122"/>
+                        <a:cs typeface="Times New Roman" panose="02020603050405020304" pitchFamily="18" charset="0"/>
+                      </a:endParaRPr>
+                    </a:p>
+                  </a:txBody>
+                  <a:tcPr marL="68580" marR="68580" marT="0" marB="0" anchor="ctr">
+                    <a:lnL>
+                      <a:noFill/>
+                    </a:lnL>
+                    <a:lnR>
+                      <a:noFill/>
+                    </a:lnR>
+                    <a:lnT w="12700" cap="flat" cmpd="sng" algn="ctr">
+                      <a:solidFill>
+                        <a:srgbClr val="000000"/>
+                      </a:solidFill>
+                      <a:prstDash val="solid"/>
+                      <a:round/>
+                      <a:headEnd type="none" w="med" len="med"/>
+                      <a:tailEnd type="none" w="med" len="med"/>
+                    </a:lnT>
+                    <a:lnB w="12700" cap="flat" cmpd="sng" algn="ctr">
+                      <a:solidFill>
+                        <a:srgbClr val="000000"/>
+                      </a:solidFill>
+                      <a:prstDash val="solid"/>
+                      <a:round/>
+                      <a:headEnd type="none" w="med" len="med"/>
+                      <a:tailEnd type="none" w="med" len="med"/>
+                    </a:lnB>
+                    <a:noFill/>
+                  </a:tcPr>
+                </a:tc>
+                <a:tc>
+                  <a:txBody>
+                    <a:bodyPr/>
+                    <a:lstStyle/>
+                    <a:p>
+                      <a:pPr algn="ctr"/>
+                      <a:r>
+                        <a:rPr lang="en-US" altLang="zh-CN" sz="1600" kern="100" dirty="0">
+                          <a:effectLst/>
+                          <a:latin typeface="等线" panose="02010600030101010101" pitchFamily="2" charset="-122"/>
+                          <a:ea typeface="+mn-ea"/>
+                          <a:cs typeface="Times New Roman" panose="02020603050405020304" pitchFamily="18" charset="0"/>
+                        </a:rPr>
+                        <a:t>1.4</a:t>
+                      </a:r>
+                      <a:r>
+                        <a:rPr lang="zh-CN" altLang="en-US" sz="1600" kern="100" dirty="0">
+                          <a:effectLst/>
+                          <a:latin typeface="等线" panose="02010600030101010101" pitchFamily="2" charset="-122"/>
+                          <a:ea typeface="+mn-ea"/>
+                          <a:cs typeface="Times New Roman" panose="02020603050405020304" pitchFamily="18" charset="0"/>
+                        </a:rPr>
+                        <a:t>：</a:t>
+                      </a:r>
+                      <a:r>
+                        <a:rPr lang="en-US" altLang="zh-CN" sz="1600" kern="100" dirty="0">
+                          <a:effectLst/>
+                          <a:latin typeface="等线" panose="02010600030101010101" pitchFamily="2" charset="-122"/>
+                          <a:ea typeface="+mn-ea"/>
+                          <a:cs typeface="Times New Roman" panose="02020603050405020304" pitchFamily="18" charset="0"/>
+                        </a:rPr>
+                        <a:t>1</a:t>
+                      </a:r>
+                      <a:r>
+                        <a:rPr lang="zh-CN" altLang="en-US" sz="1600" kern="100" dirty="0">
+                          <a:effectLst/>
+                          <a:latin typeface="等线" panose="02010600030101010101" pitchFamily="2" charset="-122"/>
+                          <a:ea typeface="+mn-ea"/>
+                          <a:cs typeface="Times New Roman" panose="02020603050405020304" pitchFamily="18" charset="0"/>
+                        </a:rPr>
+                        <a:t>：</a:t>
+                      </a:r>
+                      <a:r>
+                        <a:rPr lang="en-US" altLang="zh-CN" sz="1600" kern="100" dirty="0">
+                          <a:effectLst/>
+                          <a:latin typeface="等线" panose="02010600030101010101" pitchFamily="2" charset="-122"/>
+                          <a:ea typeface="+mn-ea"/>
+                          <a:cs typeface="Times New Roman" panose="02020603050405020304" pitchFamily="18" charset="0"/>
+                        </a:rPr>
+                        <a:t>7</a:t>
+                      </a:r>
+                      <a:endParaRPr lang="zh-CN" altLang="zh-CN" sz="1600" kern="100" dirty="0">
+                        <a:effectLst/>
+                        <a:latin typeface="等线" panose="02010600030101010101" pitchFamily="2" charset="-122"/>
+                        <a:ea typeface="+mn-ea"/>
+                        <a:cs typeface="Times New Roman" panose="02020603050405020304" pitchFamily="18" charset="0"/>
+                      </a:endParaRPr>
+                    </a:p>
+                  </a:txBody>
+                  <a:tcPr marL="68580" marR="68580" marT="0" marB="0" anchor="ctr">
+                    <a:lnL>
+                      <a:noFill/>
+                    </a:lnL>
+                    <a:lnR>
+                      <a:noFill/>
+                    </a:lnR>
+                    <a:lnT w="12700" cap="flat" cmpd="sng" algn="ctr">
+                      <a:solidFill>
+                        <a:srgbClr val="000000"/>
+                      </a:solidFill>
+                      <a:prstDash val="solid"/>
+                      <a:round/>
+                      <a:headEnd type="none" w="med" len="med"/>
+                      <a:tailEnd type="none" w="med" len="med"/>
+                    </a:lnT>
+                    <a:lnB w="12700" cap="flat" cmpd="sng" algn="ctr">
+                      <a:solidFill>
+                        <a:srgbClr val="000000"/>
+                      </a:solidFill>
+                      <a:prstDash val="solid"/>
+                      <a:round/>
+                      <a:headEnd type="none" w="med" len="med"/>
+                      <a:tailEnd type="none" w="med" len="med"/>
+                    </a:lnB>
+                    <a:noFill/>
+                  </a:tcPr>
+                </a:tc>
+                <a:tc>
+                  <a:txBody>
+                    <a:bodyPr/>
+                    <a:lstStyle/>
+                    <a:p>
+                      <a:pPr algn="ctr"/>
+                      <a:r>
+                        <a:rPr lang="zh-CN" altLang="en-US" sz="1600" kern="100" dirty="0">
+                          <a:effectLst/>
+                          <a:latin typeface="等线" panose="02010600030101010101" pitchFamily="2" charset="-122"/>
+                          <a:ea typeface="+mn-ea"/>
+                          <a:cs typeface="Times New Roman" panose="02020603050405020304" pitchFamily="18" charset="0"/>
+                        </a:rPr>
+                        <a:t>常温</a:t>
+                      </a:r>
+                      <a:endParaRPr lang="zh-CN" sz="1600" kern="100" dirty="0">
+                        <a:effectLst/>
+                        <a:latin typeface="等线" panose="02010600030101010101" pitchFamily="2" charset="-122"/>
+                        <a:ea typeface="等线" panose="02010600030101010101" pitchFamily="2" charset="-122"/>
+                        <a:cs typeface="Times New Roman" panose="02020603050405020304" pitchFamily="18" charset="0"/>
+                      </a:endParaRPr>
+                    </a:p>
+                  </a:txBody>
+                  <a:tcPr marL="68580" marR="68580" marT="0" marB="0" anchor="ctr">
+                    <a:lnL>
+                      <a:noFill/>
+                    </a:lnL>
+                    <a:lnR>
+                      <a:noFill/>
+                    </a:lnR>
+                    <a:lnT w="12700" cap="flat" cmpd="sng" algn="ctr">
+                      <a:solidFill>
+                        <a:srgbClr val="000000"/>
+                      </a:solidFill>
+                      <a:prstDash val="solid"/>
+                      <a:round/>
+                      <a:headEnd type="none" w="med" len="med"/>
+                      <a:tailEnd type="none" w="med" len="med"/>
+                    </a:lnT>
+                    <a:lnB w="12700" cap="flat" cmpd="sng" algn="ctr">
+                      <a:solidFill>
+                        <a:srgbClr val="000000"/>
+                      </a:solidFill>
+                      <a:prstDash val="solid"/>
+                      <a:round/>
+                      <a:headEnd type="none" w="med" len="med"/>
+                      <a:tailEnd type="none" w="med" len="med"/>
+                    </a:lnB>
+                    <a:noFill/>
+                  </a:tcPr>
+                </a:tc>
+                <a:tc>
+                  <a:txBody>
+                    <a:bodyPr/>
+                    <a:lstStyle/>
+                    <a:p>
+                      <a:pPr algn="ctr"/>
+                      <a:endParaRPr lang="zh-CN" sz="1600" kern="100" dirty="0">
+                        <a:effectLst/>
+                        <a:latin typeface="等线" panose="02010600030101010101" pitchFamily="2" charset="-122"/>
+                        <a:ea typeface="等线" panose="02010600030101010101" pitchFamily="2" charset="-122"/>
+                        <a:cs typeface="Times New Roman" panose="02020603050405020304" pitchFamily="18" charset="0"/>
+                      </a:endParaRPr>
+                    </a:p>
+                  </a:txBody>
+                  <a:tcPr marL="68580" marR="68580" marT="0" marB="0" anchor="ctr">
+                    <a:lnL>
+                      <a:noFill/>
+                    </a:lnL>
+                    <a:lnR>
+                      <a:noFill/>
+                    </a:lnR>
+                    <a:lnT w="12700" cap="flat" cmpd="sng" algn="ctr">
+                      <a:solidFill>
+                        <a:srgbClr val="000000"/>
+                      </a:solidFill>
+                      <a:prstDash val="solid"/>
+                      <a:round/>
+                      <a:headEnd type="none" w="med" len="med"/>
+                      <a:tailEnd type="none" w="med" len="med"/>
+                    </a:lnT>
+                    <a:lnB w="12700" cap="flat" cmpd="sng" algn="ctr">
+                      <a:solidFill>
+                        <a:srgbClr val="000000"/>
+                      </a:solidFill>
+                      <a:prstDash val="solid"/>
+                      <a:round/>
+                      <a:headEnd type="none" w="med" len="med"/>
+                      <a:tailEnd type="none" w="med" len="med"/>
+                    </a:lnB>
+                    <a:noFill/>
+                  </a:tcPr>
+                </a:tc>
+                <a:tc>
+                  <a:txBody>
+                    <a:bodyPr/>
+                    <a:lstStyle/>
+                    <a:p>
+                      <a:pPr algn="ctr"/>
+                      <a:endParaRPr lang="zh-CN" sz="1600" kern="100" dirty="0">
+                        <a:effectLst/>
+                        <a:latin typeface="等线" panose="02010600030101010101" pitchFamily="2" charset="-122"/>
+                        <a:ea typeface="等线" panose="02010600030101010101" pitchFamily="2" charset="-122"/>
+                        <a:cs typeface="Times New Roman" panose="02020603050405020304" pitchFamily="18" charset="0"/>
+                      </a:endParaRPr>
+                    </a:p>
+                  </a:txBody>
+                  <a:tcPr marL="68580" marR="68580" marT="0" marB="0" anchor="ctr">
+                    <a:lnL>
+                      <a:noFill/>
+                    </a:lnL>
+                    <a:lnR>
+                      <a:noFill/>
+                    </a:lnR>
+                    <a:lnT w="12700" cap="flat" cmpd="sng" algn="ctr">
+                      <a:solidFill>
+                        <a:srgbClr val="000000"/>
+                      </a:solidFill>
+                      <a:prstDash val="solid"/>
+                      <a:round/>
+                      <a:headEnd type="none" w="med" len="med"/>
+                      <a:tailEnd type="none" w="med" len="med"/>
+                    </a:lnT>
+                    <a:lnB w="12700" cap="flat" cmpd="sng" algn="ctr">
+                      <a:solidFill>
+                        <a:srgbClr val="000000"/>
+                      </a:solidFill>
+                      <a:prstDash val="solid"/>
+                      <a:round/>
+                      <a:headEnd type="none" w="med" len="med"/>
+                      <a:tailEnd type="none" w="med" len="med"/>
+                    </a:lnB>
+                    <a:noFill/>
+                  </a:tcPr>
+                </a:tc>
+                <a:extLst>
+                  <a:ext uri="{0D108BD9-81ED-4DB2-BD59-A6C34878D82A}">
+                    <a16:rowId xmlns:a16="http://schemas.microsoft.com/office/drawing/2014/main" val="672343722"/>
+                  </a:ext>
+                </a:extLst>
+              </a:tr>
+              <a:tr h="1029352">
+                <a:tc>
+                  <a:txBody>
+                    <a:bodyPr/>
+                    <a:lstStyle/>
+                    <a:p>
+                      <a:pPr algn="ctr"/>
+                      <a:r>
+                        <a:rPr lang="en-US" altLang="zh-CN" sz="1600" kern="100" dirty="0">
+                          <a:effectLst/>
+                          <a:latin typeface="等线" panose="02010600030101010101" pitchFamily="2" charset="-122"/>
+                          <a:ea typeface="+mn-ea"/>
+                          <a:cs typeface="Times New Roman" panose="02020603050405020304" pitchFamily="18" charset="0"/>
+                        </a:rPr>
+                        <a:t>24108060</a:t>
+                      </a:r>
+                      <a:endParaRPr lang="zh-CN" altLang="zh-CN" sz="1600" kern="100" dirty="0">
+                        <a:effectLst/>
+                        <a:latin typeface="等线" panose="02010600030101010101" pitchFamily="2" charset="-122"/>
+                        <a:ea typeface="+mn-ea"/>
+                        <a:cs typeface="Times New Roman" panose="02020603050405020304" pitchFamily="18" charset="0"/>
+                      </a:endParaRPr>
+                    </a:p>
+                  </a:txBody>
+                  <a:tcPr marL="68580" marR="68580" marT="0" marB="0" anchor="ctr">
+                    <a:lnL>
+                      <a:noFill/>
+                    </a:lnL>
+                    <a:lnR>
+                      <a:noFill/>
+                    </a:lnR>
+                    <a:lnT w="12700" cap="flat" cmpd="sng" algn="ctr">
+                      <a:solidFill>
+                        <a:srgbClr val="000000"/>
+                      </a:solidFill>
+                      <a:prstDash val="solid"/>
+                      <a:round/>
+                      <a:headEnd type="none" w="med" len="med"/>
+                      <a:tailEnd type="none" w="med" len="med"/>
+                    </a:lnT>
+                    <a:lnB>
+                      <a:noFill/>
+                    </a:lnB>
+                    <a:noFill/>
+                  </a:tcPr>
+                </a:tc>
+                <a:tc>
+                  <a:txBody>
+                    <a:bodyPr/>
+                    <a:lstStyle/>
+                    <a:p>
+                      <a:pPr algn="ctr"/>
+                      <a:r>
+                        <a:rPr lang="zh-CN" altLang="en-US" sz="1600" kern="100" dirty="0">
+                          <a:effectLst/>
+                          <a:latin typeface="等线" panose="02010600030101010101" pitchFamily="2" charset="-122"/>
+                          <a:ea typeface="+mn-ea"/>
+                          <a:cs typeface="Times New Roman" panose="02020603050405020304" pitchFamily="18" charset="0"/>
+                        </a:rPr>
+                        <a:t>麦克林</a:t>
+                      </a:r>
+                      <a:r>
+                        <a:rPr lang="en-US" altLang="zh-CN" sz="1600" kern="100" dirty="0">
+                          <a:effectLst/>
+                          <a:latin typeface="等线" panose="02010600030101010101" pitchFamily="2" charset="-122"/>
+                          <a:ea typeface="+mn-ea"/>
+                          <a:cs typeface="Times New Roman" panose="02020603050405020304" pitchFamily="18" charset="0"/>
+                        </a:rPr>
+                        <a:t>-99%-2.5kg</a:t>
+                      </a:r>
+                      <a:endParaRPr lang="zh-CN" altLang="zh-CN" sz="1600" kern="100" dirty="0">
+                        <a:effectLst/>
+                        <a:latin typeface="等线" panose="02010600030101010101" pitchFamily="2" charset="-122"/>
+                        <a:ea typeface="+mn-ea"/>
+                        <a:cs typeface="Times New Roman" panose="02020603050405020304" pitchFamily="18" charset="0"/>
+                      </a:endParaRPr>
+                    </a:p>
+                  </a:txBody>
+                  <a:tcPr marL="68580" marR="68580" marT="0" marB="0" anchor="ctr">
+                    <a:lnL>
+                      <a:noFill/>
+                    </a:lnL>
+                    <a:lnR>
+                      <a:noFill/>
+                    </a:lnR>
+                    <a:lnT w="12700" cap="flat" cmpd="sng" algn="ctr">
+                      <a:solidFill>
+                        <a:srgbClr val="000000"/>
+                      </a:solidFill>
+                      <a:prstDash val="solid"/>
+                      <a:round/>
+                      <a:headEnd type="none" w="med" len="med"/>
+                      <a:tailEnd type="none" w="med" len="med"/>
+                    </a:lnT>
+                    <a:lnB>
+                      <a:noFill/>
+                    </a:lnB>
+                    <a:noFill/>
+                  </a:tcPr>
+                </a:tc>
+                <a:tc>
+                  <a:txBody>
+                    <a:bodyPr/>
+                    <a:lstStyle/>
+                    <a:p>
+                      <a:pPr algn="ctr"/>
+                      <a:r>
+                        <a:rPr lang="zh-CN" altLang="en-US" sz="1600" kern="100" dirty="0">
+                          <a:effectLst/>
+                          <a:latin typeface="等线" panose="02010600030101010101" pitchFamily="2" charset="-122"/>
+                          <a:ea typeface="等线" panose="02010600030101010101" pitchFamily="2" charset="-122"/>
+                          <a:cs typeface="Times New Roman" panose="02020603050405020304" pitchFamily="18" charset="0"/>
+                        </a:rPr>
+                        <a:t>阿拉丁</a:t>
+                      </a:r>
+                      <a:r>
+                        <a:rPr lang="en-US" altLang="zh-CN" sz="1600" kern="100" dirty="0">
+                          <a:effectLst/>
+                          <a:latin typeface="等线" panose="02010600030101010101" pitchFamily="2" charset="-122"/>
+                          <a:ea typeface="等线" panose="02010600030101010101" pitchFamily="2" charset="-122"/>
+                          <a:cs typeface="Times New Roman" panose="02020603050405020304" pitchFamily="18" charset="0"/>
+                        </a:rPr>
+                        <a:t>-99.5%-</a:t>
+                      </a:r>
+                      <a:r>
+                        <a:rPr lang="zh-CN" altLang="en-US" sz="1600" kern="100" dirty="0">
+                          <a:effectLst/>
+                          <a:latin typeface="等线" panose="02010600030101010101" pitchFamily="2" charset="-122"/>
+                          <a:ea typeface="等线" panose="02010600030101010101" pitchFamily="2" charset="-122"/>
+                          <a:cs typeface="Times New Roman" panose="02020603050405020304" pitchFamily="18" charset="0"/>
+                        </a:rPr>
+                        <a:t>大桶</a:t>
+                      </a:r>
+                      <a:endParaRPr lang="zh-CN" sz="1600" kern="100" dirty="0">
+                        <a:effectLst/>
+                        <a:latin typeface="等线" panose="02010600030101010101" pitchFamily="2" charset="-122"/>
+                        <a:ea typeface="等线" panose="02010600030101010101" pitchFamily="2" charset="-122"/>
+                        <a:cs typeface="Times New Roman" panose="02020603050405020304" pitchFamily="18" charset="0"/>
+                      </a:endParaRPr>
+                    </a:p>
+                  </a:txBody>
+                  <a:tcPr marL="68580" marR="68580" marT="0" marB="0" anchor="ctr">
+                    <a:lnL>
+                      <a:noFill/>
+                    </a:lnL>
+                    <a:lnR>
+                      <a:noFill/>
+                    </a:lnR>
+                    <a:lnT w="12700" cap="flat" cmpd="sng" algn="ctr">
+                      <a:solidFill>
+                        <a:srgbClr val="000000"/>
+                      </a:solidFill>
+                      <a:prstDash val="solid"/>
+                      <a:round/>
+                      <a:headEnd type="none" w="med" len="med"/>
+                      <a:tailEnd type="none" w="med" len="med"/>
+                    </a:lnT>
+                    <a:lnB>
+                      <a:noFill/>
+                    </a:lnB>
+                    <a:noFill/>
+                  </a:tcPr>
+                </a:tc>
+                <a:tc>
+                  <a:txBody>
+                    <a:bodyPr/>
+                    <a:lstStyle/>
+                    <a:p>
+                      <a:pPr algn="ctr"/>
+                      <a:r>
+                        <a:rPr lang="zh-CN" altLang="en-US" sz="1600" kern="100" dirty="0">
+                          <a:effectLst/>
+                          <a:latin typeface="等线" panose="02010600030101010101" pitchFamily="2" charset="-122"/>
+                          <a:ea typeface="等线" panose="02010600030101010101" pitchFamily="2" charset="-122"/>
+                          <a:cs typeface="Times New Roman" panose="02020603050405020304" pitchFamily="18" charset="0"/>
+                        </a:rPr>
+                        <a:t>迈瑞尔</a:t>
+                      </a:r>
+                      <a:r>
+                        <a:rPr lang="en-US" altLang="zh-CN" sz="1600" kern="100" dirty="0">
+                          <a:effectLst/>
+                          <a:latin typeface="等线" panose="02010600030101010101" pitchFamily="2" charset="-122"/>
+                          <a:ea typeface="等线" panose="02010600030101010101" pitchFamily="2" charset="-122"/>
+                          <a:cs typeface="Times New Roman" panose="02020603050405020304" pitchFamily="18" charset="0"/>
+                        </a:rPr>
+                        <a:t>-57%-500ml</a:t>
+                      </a:r>
+                      <a:endParaRPr lang="zh-CN" sz="1600" kern="100" dirty="0">
+                        <a:effectLst/>
+                        <a:latin typeface="等线" panose="02010600030101010101" pitchFamily="2" charset="-122"/>
+                        <a:ea typeface="等线" panose="02010600030101010101" pitchFamily="2" charset="-122"/>
+                        <a:cs typeface="Times New Roman" panose="02020603050405020304" pitchFamily="18" charset="0"/>
+                      </a:endParaRPr>
+                    </a:p>
+                  </a:txBody>
+                  <a:tcPr marL="68580" marR="68580" marT="0" marB="0" anchor="ctr">
+                    <a:lnL>
+                      <a:noFill/>
+                    </a:lnL>
+                    <a:lnR>
+                      <a:noFill/>
+                    </a:lnR>
+                    <a:lnT w="12700" cap="flat" cmpd="sng" algn="ctr">
+                      <a:solidFill>
+                        <a:srgbClr val="000000"/>
+                      </a:solidFill>
+                      <a:prstDash val="solid"/>
+                      <a:round/>
+                      <a:headEnd type="none" w="med" len="med"/>
+                      <a:tailEnd type="none" w="med" len="med"/>
+                    </a:lnT>
+                    <a:lnB>
+                      <a:noFill/>
+                    </a:lnB>
+                    <a:noFill/>
+                  </a:tcPr>
+                </a:tc>
+                <a:tc>
+                  <a:txBody>
+                    <a:bodyPr/>
+                    <a:lstStyle/>
+                    <a:p>
+                      <a:pPr algn="ctr"/>
+                      <a:r>
+                        <a:rPr lang="en-US" altLang="zh-CN" sz="1600" kern="100" dirty="0">
+                          <a:effectLst/>
+                          <a:latin typeface="等线" panose="02010600030101010101" pitchFamily="2" charset="-122"/>
+                          <a:ea typeface="+mn-ea"/>
+                          <a:cs typeface="Times New Roman" panose="02020603050405020304" pitchFamily="18" charset="0"/>
+                        </a:rPr>
+                        <a:t>1.5</a:t>
+                      </a:r>
+                      <a:r>
+                        <a:rPr lang="zh-CN" altLang="en-US" sz="1600" kern="100" dirty="0">
+                          <a:effectLst/>
+                          <a:latin typeface="等线" panose="02010600030101010101" pitchFamily="2" charset="-122"/>
+                          <a:ea typeface="+mn-ea"/>
+                          <a:cs typeface="Times New Roman" panose="02020603050405020304" pitchFamily="18" charset="0"/>
+                        </a:rPr>
+                        <a:t>：</a:t>
+                      </a:r>
+                      <a:r>
+                        <a:rPr lang="en-US" altLang="zh-CN" sz="1600" kern="100" dirty="0">
+                          <a:effectLst/>
+                          <a:latin typeface="等线" panose="02010600030101010101" pitchFamily="2" charset="-122"/>
+                          <a:ea typeface="+mn-ea"/>
+                          <a:cs typeface="Times New Roman" panose="02020603050405020304" pitchFamily="18" charset="0"/>
+                        </a:rPr>
+                        <a:t>1</a:t>
+                      </a:r>
+                      <a:r>
+                        <a:rPr lang="zh-CN" altLang="en-US" sz="1600" kern="100" dirty="0">
+                          <a:effectLst/>
+                          <a:latin typeface="等线" panose="02010600030101010101" pitchFamily="2" charset="-122"/>
+                          <a:ea typeface="+mn-ea"/>
+                          <a:cs typeface="Times New Roman" panose="02020603050405020304" pitchFamily="18" charset="0"/>
+                        </a:rPr>
+                        <a:t>：</a:t>
+                      </a:r>
+                      <a:r>
+                        <a:rPr lang="en-US" altLang="zh-CN" sz="1600" kern="100" dirty="0">
+                          <a:effectLst/>
+                          <a:latin typeface="等线" panose="02010600030101010101" pitchFamily="2" charset="-122"/>
+                          <a:ea typeface="+mn-ea"/>
+                          <a:cs typeface="Times New Roman" panose="02020603050405020304" pitchFamily="18" charset="0"/>
+                        </a:rPr>
+                        <a:t>7</a:t>
+                      </a:r>
+                      <a:endParaRPr lang="zh-CN" altLang="zh-CN" sz="1600" kern="100" dirty="0">
+                        <a:effectLst/>
+                        <a:latin typeface="等线" panose="02010600030101010101" pitchFamily="2" charset="-122"/>
+                        <a:ea typeface="+mn-ea"/>
+                        <a:cs typeface="Times New Roman" panose="02020603050405020304" pitchFamily="18" charset="0"/>
+                      </a:endParaRPr>
+                    </a:p>
+                  </a:txBody>
+                  <a:tcPr marL="68580" marR="68580" marT="0" marB="0" anchor="ctr">
+                    <a:lnL>
+                      <a:noFill/>
+                    </a:lnL>
+                    <a:lnR>
+                      <a:noFill/>
+                    </a:lnR>
+                    <a:lnT w="12700" cap="flat" cmpd="sng" algn="ctr">
+                      <a:solidFill>
+                        <a:srgbClr val="000000"/>
+                      </a:solidFill>
+                      <a:prstDash val="solid"/>
+                      <a:round/>
+                      <a:headEnd type="none" w="med" len="med"/>
+                      <a:tailEnd type="none" w="med" len="med"/>
+                    </a:lnT>
+                    <a:lnB>
+                      <a:noFill/>
+                    </a:lnB>
+                    <a:noFill/>
+                  </a:tcPr>
+                </a:tc>
+                <a:tc>
+                  <a:txBody>
+                    <a:bodyPr/>
+                    <a:lstStyle/>
+                    <a:p>
+                      <a:pPr algn="ctr"/>
+                      <a:r>
+                        <a:rPr lang="zh-CN" altLang="en-US" sz="1600" kern="100" dirty="0">
+                          <a:effectLst/>
+                          <a:latin typeface="等线" panose="02010600030101010101" pitchFamily="2" charset="-122"/>
+                          <a:ea typeface="+mn-ea"/>
+                          <a:cs typeface="Times New Roman" panose="02020603050405020304" pitchFamily="18" charset="0"/>
+                        </a:rPr>
+                        <a:t>常温</a:t>
+                      </a:r>
+                      <a:endParaRPr lang="zh-CN" sz="1600" kern="100" dirty="0">
+                        <a:effectLst/>
+                        <a:latin typeface="等线" panose="02010600030101010101" pitchFamily="2" charset="-122"/>
+                        <a:ea typeface="等线" panose="02010600030101010101" pitchFamily="2" charset="-122"/>
+                        <a:cs typeface="Times New Roman" panose="02020603050405020304" pitchFamily="18" charset="0"/>
+                      </a:endParaRPr>
+                    </a:p>
+                  </a:txBody>
+                  <a:tcPr marL="68580" marR="68580" marT="0" marB="0" anchor="ctr">
+                    <a:lnL>
+                      <a:noFill/>
+                    </a:lnL>
+                    <a:lnR>
+                      <a:noFill/>
+                    </a:lnR>
+                    <a:lnT w="12700" cap="flat" cmpd="sng" algn="ctr">
+                      <a:solidFill>
+                        <a:srgbClr val="000000"/>
+                      </a:solidFill>
+                      <a:prstDash val="solid"/>
+                      <a:round/>
+                      <a:headEnd type="none" w="med" len="med"/>
+                      <a:tailEnd type="none" w="med" len="med"/>
+                    </a:lnT>
+                    <a:lnB>
+                      <a:noFill/>
+                    </a:lnB>
+                    <a:noFill/>
+                  </a:tcPr>
+                </a:tc>
+                <a:tc>
+                  <a:txBody>
+                    <a:bodyPr/>
+                    <a:lstStyle/>
+                    <a:p>
+                      <a:pPr algn="ctr"/>
+                      <a:endParaRPr lang="zh-CN" sz="1600" kern="100" dirty="0">
+                        <a:effectLst/>
+                        <a:latin typeface="等线" panose="02010600030101010101" pitchFamily="2" charset="-122"/>
+                        <a:ea typeface="等线" panose="02010600030101010101" pitchFamily="2" charset="-122"/>
+                        <a:cs typeface="Times New Roman" panose="02020603050405020304" pitchFamily="18" charset="0"/>
+                      </a:endParaRPr>
+                    </a:p>
+                  </a:txBody>
+                  <a:tcPr marL="68580" marR="68580" marT="0" marB="0" anchor="ctr">
+                    <a:lnL>
+                      <a:noFill/>
+                    </a:lnL>
+                    <a:lnR>
+                      <a:noFill/>
+                    </a:lnR>
+                    <a:lnT w="12700" cap="flat" cmpd="sng" algn="ctr">
+                      <a:solidFill>
+                        <a:srgbClr val="000000"/>
+                      </a:solidFill>
+                      <a:prstDash val="solid"/>
+                      <a:round/>
+                      <a:headEnd type="none" w="med" len="med"/>
+                      <a:tailEnd type="none" w="med" len="med"/>
+                    </a:lnT>
+                    <a:lnB>
+                      <a:noFill/>
+                    </a:lnB>
+                    <a:noFill/>
+                  </a:tcPr>
+                </a:tc>
+                <a:tc>
+                  <a:txBody>
+                    <a:bodyPr/>
+                    <a:lstStyle/>
+                    <a:p>
+                      <a:pPr algn="ctr"/>
+                      <a:endParaRPr lang="zh-CN" sz="1600" kern="100" dirty="0">
+                        <a:effectLst/>
+                        <a:latin typeface="等线" panose="02010600030101010101" pitchFamily="2" charset="-122"/>
+                        <a:ea typeface="等线" panose="02010600030101010101" pitchFamily="2" charset="-122"/>
+                        <a:cs typeface="Times New Roman" panose="02020603050405020304" pitchFamily="18" charset="0"/>
+                      </a:endParaRPr>
+                    </a:p>
+                  </a:txBody>
+                  <a:tcPr marL="68580" marR="68580" marT="0" marB="0" anchor="ctr">
+                    <a:lnL>
+                      <a:noFill/>
+                    </a:lnL>
+                    <a:lnR>
+                      <a:noFill/>
+                    </a:lnR>
+                    <a:lnT w="12700" cap="flat" cmpd="sng" algn="ctr">
+                      <a:solidFill>
+                        <a:srgbClr val="000000"/>
+                      </a:solidFill>
+                      <a:prstDash val="solid"/>
+                      <a:round/>
+                      <a:headEnd type="none" w="med" len="med"/>
+                      <a:tailEnd type="none" w="med" len="med"/>
+                    </a:lnT>
+                    <a:lnB>
+                      <a:noFill/>
+                    </a:lnB>
+                    <a:noFill/>
+                  </a:tcPr>
+                </a:tc>
+                <a:extLst>
+                  <a:ext uri="{0D108BD9-81ED-4DB2-BD59-A6C34878D82A}">
+                    <a16:rowId xmlns:a16="http://schemas.microsoft.com/office/drawing/2014/main" val="3955731464"/>
+                  </a:ext>
+                </a:extLst>
+              </a:tr>
+            </a:tbl>
+          </a:graphicData>
+        </a:graphic>
+      </p:graphicFrame>
+      <p:graphicFrame>
+        <p:nvGraphicFramePr>
+          <p:cNvPr id="3" name="对象 2">
+            <a:extLst>
+              <a:ext uri="{FF2B5EF4-FFF2-40B4-BE49-F238E27FC236}">
+                <a16:creationId xmlns:a16="http://schemas.microsoft.com/office/drawing/2014/main" id="{7DF6B16B-B64E-14DA-B937-F9FCDB6874B4}"/>
+              </a:ext>
+            </a:extLst>
+          </p:cNvPr>
+          <p:cNvGraphicFramePr>
+            <a:graphicFrameLocks noChangeAspect="1"/>
+          </p:cNvGraphicFramePr>
+          <p:nvPr/>
+        </p:nvGraphicFramePr>
+        <p:xfrm>
+          <a:off x="10527956" y="2700368"/>
+          <a:ext cx="1569565" cy="1202479"/>
+        </p:xfrm>
+        <a:graphic>
+          <a:graphicData uri="http://schemas.openxmlformats.org/presentationml/2006/ole">
+            <mc:AlternateContent xmlns:mc="http://schemas.openxmlformats.org/markup-compatibility/2006">
+              <mc:Choice xmlns:v="urn:schemas-microsoft-com:vml" Requires="v">
+                <p:oleObj name="Graph" r:id="rId2" imgW="9802184" imgH="7502368" progId="Origin95.Graph">
+                  <p:embed/>
+                </p:oleObj>
+              </mc:Choice>
+              <mc:Fallback>
+                <p:oleObj name="Graph" r:id="rId2" imgW="9802184" imgH="7502368" progId="Origin95.Graph">
+                  <p:embed/>
+                  <p:pic>
+                    <p:nvPicPr>
+                      <p:cNvPr id="3" name="对象 2">
+                        <a:extLst>
+                          <a:ext uri="{FF2B5EF4-FFF2-40B4-BE49-F238E27FC236}">
+                            <a16:creationId xmlns:a16="http://schemas.microsoft.com/office/drawing/2014/main" id="{7DF6B16B-B64E-14DA-B937-F9FCDB6874B4}"/>
+                          </a:ext>
+                        </a:extLst>
+                      </p:cNvPr>
+                      <p:cNvPicPr/>
+                      <p:nvPr/>
+                    </p:nvPicPr>
+                    <p:blipFill>
+                      <a:blip r:embed="rId3"/>
+                      <a:stretch>
+                        <a:fillRect/>
+                      </a:stretch>
+                    </p:blipFill>
+                    <p:spPr>
+                      <a:xfrm>
+                        <a:off x="10527956" y="2700368"/>
+                        <a:ext cx="1569565" cy="1202479"/>
+                      </a:xfrm>
+                      <a:prstGeom prst="rect">
+                        <a:avLst/>
+                      </a:prstGeom>
+                    </p:spPr>
+                  </p:pic>
+                </p:oleObj>
+              </mc:Fallback>
+            </mc:AlternateContent>
+          </a:graphicData>
+        </a:graphic>
+      </p:graphicFrame>
+      <p:graphicFrame>
+        <p:nvGraphicFramePr>
+          <p:cNvPr id="4" name="对象 3">
+            <a:extLst>
+              <a:ext uri="{FF2B5EF4-FFF2-40B4-BE49-F238E27FC236}">
+                <a16:creationId xmlns:a16="http://schemas.microsoft.com/office/drawing/2014/main" id="{ECBB4A0F-2A4F-BC8E-D9A7-53785F90DFCB}"/>
+              </a:ext>
+            </a:extLst>
+          </p:cNvPr>
+          <p:cNvGraphicFramePr>
+            <a:graphicFrameLocks noChangeAspect="1"/>
+          </p:cNvGraphicFramePr>
+          <p:nvPr/>
+        </p:nvGraphicFramePr>
+        <p:xfrm>
+          <a:off x="10450650" y="5586461"/>
+          <a:ext cx="1763656" cy="1351177"/>
+        </p:xfrm>
+        <a:graphic>
+          <a:graphicData uri="http://schemas.openxmlformats.org/presentationml/2006/ole">
+            <mc:AlternateContent xmlns:mc="http://schemas.openxmlformats.org/markup-compatibility/2006">
+              <mc:Choice xmlns:v="urn:schemas-microsoft-com:vml" Requires="v">
+                <p:oleObj name="Graph" r:id="rId4" imgW="9802184" imgH="7502368" progId="Origin95.Graph">
+                  <p:embed/>
+                </p:oleObj>
+              </mc:Choice>
+              <mc:Fallback>
+                <p:oleObj name="Graph" r:id="rId4" imgW="9802184" imgH="7502368" progId="Origin95.Graph">
+                  <p:embed/>
+                  <p:pic>
+                    <p:nvPicPr>
+                      <p:cNvPr id="4" name="对象 3">
+                        <a:extLst>
+                          <a:ext uri="{FF2B5EF4-FFF2-40B4-BE49-F238E27FC236}">
+                            <a16:creationId xmlns:a16="http://schemas.microsoft.com/office/drawing/2014/main" id="{ECBB4A0F-2A4F-BC8E-D9A7-53785F90DFCB}"/>
+                          </a:ext>
+                        </a:extLst>
+                      </p:cNvPr>
+                      <p:cNvPicPr/>
+                      <p:nvPr/>
+                    </p:nvPicPr>
+                    <p:blipFill>
+                      <a:blip r:embed="rId5"/>
+                      <a:stretch>
+                        <a:fillRect/>
+                      </a:stretch>
+                    </p:blipFill>
+                    <p:spPr>
+                      <a:xfrm>
+                        <a:off x="10450650" y="5586461"/>
+                        <a:ext cx="1763656" cy="1351177"/>
+                      </a:xfrm>
+                      <a:prstGeom prst="rect">
+                        <a:avLst/>
+                      </a:prstGeom>
+                    </p:spPr>
+                  </p:pic>
+                </p:oleObj>
+              </mc:Fallback>
+            </mc:AlternateContent>
+          </a:graphicData>
+        </a:graphic>
+      </p:graphicFrame>
+      <p:graphicFrame>
+        <p:nvGraphicFramePr>
+          <p:cNvPr id="6" name="对象 5">
+            <a:extLst>
+              <a:ext uri="{FF2B5EF4-FFF2-40B4-BE49-F238E27FC236}">
+                <a16:creationId xmlns:a16="http://schemas.microsoft.com/office/drawing/2014/main" id="{4A571982-DE09-D671-95AB-2051D87BD258}"/>
+              </a:ext>
+            </a:extLst>
+          </p:cNvPr>
+          <p:cNvGraphicFramePr>
+            <a:graphicFrameLocks noChangeAspect="1"/>
+          </p:cNvGraphicFramePr>
+          <p:nvPr/>
+        </p:nvGraphicFramePr>
+        <p:xfrm>
+          <a:off x="10612569" y="4791467"/>
+          <a:ext cx="1217397" cy="932676"/>
+        </p:xfrm>
+        <a:graphic>
+          <a:graphicData uri="http://schemas.openxmlformats.org/presentationml/2006/ole">
+            <mc:AlternateContent xmlns:mc="http://schemas.openxmlformats.org/markup-compatibility/2006">
+              <mc:Choice xmlns:v="urn:schemas-microsoft-com:vml" Requires="v">
+                <p:oleObj name="Graph" r:id="rId6" imgW="9802184" imgH="7502368" progId="Origin95.Graph">
+                  <p:embed/>
+                </p:oleObj>
+              </mc:Choice>
+              <mc:Fallback>
+                <p:oleObj name="Graph" r:id="rId6" imgW="9802184" imgH="7502368" progId="Origin95.Graph">
+                  <p:embed/>
+                  <p:pic>
+                    <p:nvPicPr>
+                      <p:cNvPr id="6" name="对象 5">
+                        <a:extLst>
+                          <a:ext uri="{FF2B5EF4-FFF2-40B4-BE49-F238E27FC236}">
+                            <a16:creationId xmlns:a16="http://schemas.microsoft.com/office/drawing/2014/main" id="{4A571982-DE09-D671-95AB-2051D87BD258}"/>
+                          </a:ext>
+                        </a:extLst>
+                      </p:cNvPr>
+                      <p:cNvPicPr/>
+                      <p:nvPr/>
+                    </p:nvPicPr>
+                    <p:blipFill>
+                      <a:blip r:embed="rId7"/>
+                      <a:stretch>
+                        <a:fillRect/>
+                      </a:stretch>
+                    </p:blipFill>
+                    <p:spPr>
+                      <a:xfrm>
+                        <a:off x="10612569" y="4791467"/>
+                        <a:ext cx="1217397" cy="932676"/>
+                      </a:xfrm>
+                      <a:prstGeom prst="rect">
+                        <a:avLst/>
+                      </a:prstGeom>
+                    </p:spPr>
+                  </p:pic>
+                </p:oleObj>
+              </mc:Fallback>
+            </mc:AlternateContent>
+          </a:graphicData>
+        </a:graphic>
+      </p:graphicFrame>
+      <p:graphicFrame>
+        <p:nvGraphicFramePr>
+          <p:cNvPr id="7" name="对象 6">
+            <a:extLst>
+              <a:ext uri="{FF2B5EF4-FFF2-40B4-BE49-F238E27FC236}">
+                <a16:creationId xmlns:a16="http://schemas.microsoft.com/office/drawing/2014/main" id="{24F0A7C2-AE65-6EE5-5246-649E0DBE5AF3}"/>
+              </a:ext>
+            </a:extLst>
+          </p:cNvPr>
+          <p:cNvGraphicFramePr>
+            <a:graphicFrameLocks noChangeAspect="1"/>
+          </p:cNvGraphicFramePr>
+          <p:nvPr/>
+        </p:nvGraphicFramePr>
+        <p:xfrm>
+          <a:off x="10624925" y="3752347"/>
+          <a:ext cx="1415106" cy="1084145"/>
+        </p:xfrm>
+        <a:graphic>
+          <a:graphicData uri="http://schemas.openxmlformats.org/presentationml/2006/ole">
+            <mc:AlternateContent xmlns:mc="http://schemas.openxmlformats.org/markup-compatibility/2006">
+              <mc:Choice xmlns:v="urn:schemas-microsoft-com:vml" Requires="v">
+                <p:oleObj name="Graph" r:id="rId8" imgW="9802184" imgH="7502368" progId="Origin95.Graph">
+                  <p:embed/>
+                </p:oleObj>
+              </mc:Choice>
+              <mc:Fallback>
+                <p:oleObj name="Graph" r:id="rId8" imgW="9802184" imgH="7502368" progId="Origin95.Graph">
+                  <p:embed/>
+                  <p:pic>
+                    <p:nvPicPr>
+                      <p:cNvPr id="7" name="对象 6">
+                        <a:extLst>
+                          <a:ext uri="{FF2B5EF4-FFF2-40B4-BE49-F238E27FC236}">
+                            <a16:creationId xmlns:a16="http://schemas.microsoft.com/office/drawing/2014/main" id="{24F0A7C2-AE65-6EE5-5246-649E0DBE5AF3}"/>
+                          </a:ext>
+                        </a:extLst>
+                      </p:cNvPr>
+                      <p:cNvPicPr/>
+                      <p:nvPr/>
+                    </p:nvPicPr>
+                    <p:blipFill>
+                      <a:blip r:embed="rId9"/>
+                      <a:stretch>
+                        <a:fillRect/>
+                      </a:stretch>
+                    </p:blipFill>
+                    <p:spPr>
+                      <a:xfrm>
+                        <a:off x="10624925" y="3752347"/>
+                        <a:ext cx="1415106" cy="1084145"/>
+                      </a:xfrm>
+                      <a:prstGeom prst="rect">
+                        <a:avLst/>
+                      </a:prstGeom>
+                    </p:spPr>
+                  </p:pic>
+                </p:oleObj>
+              </mc:Fallback>
+            </mc:AlternateContent>
+          </a:graphicData>
+        </a:graphic>
+      </p:graphicFrame>
+      <p:graphicFrame>
+        <p:nvGraphicFramePr>
+          <p:cNvPr id="8" name="对象 7">
+            <a:extLst>
+              <a:ext uri="{FF2B5EF4-FFF2-40B4-BE49-F238E27FC236}">
+                <a16:creationId xmlns:a16="http://schemas.microsoft.com/office/drawing/2014/main" id="{550B3BD7-A5DD-7643-312D-0CA62C9BB701}"/>
+              </a:ext>
+            </a:extLst>
+          </p:cNvPr>
+          <p:cNvGraphicFramePr>
+            <a:graphicFrameLocks noChangeAspect="1"/>
+          </p:cNvGraphicFramePr>
+          <p:nvPr/>
+        </p:nvGraphicFramePr>
+        <p:xfrm>
+          <a:off x="10489002" y="1668290"/>
+          <a:ext cx="1501602" cy="1150412"/>
+        </p:xfrm>
+        <a:graphic>
+          <a:graphicData uri="http://schemas.openxmlformats.org/presentationml/2006/ole">
+            <mc:AlternateContent xmlns:mc="http://schemas.openxmlformats.org/markup-compatibility/2006">
+              <mc:Choice xmlns:v="urn:schemas-microsoft-com:vml" Requires="v">
+                <p:oleObj name="Graph" r:id="rId10" imgW="9802184" imgH="7502368" progId="Origin95.Graph">
+                  <p:embed/>
+                </p:oleObj>
+              </mc:Choice>
+              <mc:Fallback>
+                <p:oleObj name="Graph" r:id="rId10" imgW="9802184" imgH="7502368" progId="Origin95.Graph">
+                  <p:embed/>
+                  <p:pic>
+                    <p:nvPicPr>
+                      <p:cNvPr id="8" name="对象 7">
+                        <a:extLst>
+                          <a:ext uri="{FF2B5EF4-FFF2-40B4-BE49-F238E27FC236}">
+                            <a16:creationId xmlns:a16="http://schemas.microsoft.com/office/drawing/2014/main" id="{550B3BD7-A5DD-7643-312D-0CA62C9BB701}"/>
+                          </a:ext>
+                        </a:extLst>
+                      </p:cNvPr>
+                      <p:cNvPicPr/>
+                      <p:nvPr/>
+                    </p:nvPicPr>
+                    <p:blipFill>
+                      <a:blip r:embed="rId11"/>
+                      <a:stretch>
+                        <a:fillRect/>
+                      </a:stretch>
+                    </p:blipFill>
+                    <p:spPr>
+                      <a:xfrm>
+                        <a:off x="10489002" y="1668290"/>
+                        <a:ext cx="1501602" cy="1150412"/>
+                      </a:xfrm>
+                      <a:prstGeom prst="rect">
+                        <a:avLst/>
+                      </a:prstGeom>
+                    </p:spPr>
+                  </p:pic>
+                </p:oleObj>
+              </mc:Fallback>
+            </mc:AlternateContent>
+          </a:graphicData>
+        </a:graphic>
+      </p:graphicFrame>
+      <p:graphicFrame>
+        <p:nvGraphicFramePr>
+          <p:cNvPr id="9" name="对象 8">
+            <a:extLst>
+              <a:ext uri="{FF2B5EF4-FFF2-40B4-BE49-F238E27FC236}">
+                <a16:creationId xmlns:a16="http://schemas.microsoft.com/office/drawing/2014/main" id="{9B58CC1F-4744-70DE-B08D-26C7A67477E5}"/>
+              </a:ext>
+            </a:extLst>
+          </p:cNvPr>
+          <p:cNvGraphicFramePr>
+            <a:graphicFrameLocks noChangeAspect="1"/>
+          </p:cNvGraphicFramePr>
+          <p:nvPr/>
+        </p:nvGraphicFramePr>
+        <p:xfrm>
+          <a:off x="10228943" y="367858"/>
+          <a:ext cx="2021719" cy="1548885"/>
+        </p:xfrm>
+        <a:graphic>
+          <a:graphicData uri="http://schemas.openxmlformats.org/presentationml/2006/ole">
+            <mc:AlternateContent xmlns:mc="http://schemas.openxmlformats.org/markup-compatibility/2006">
+              <mc:Choice xmlns:v="urn:schemas-microsoft-com:vml" Requires="v">
+                <p:oleObj name="Graph" r:id="rId12" imgW="9802184" imgH="7502368" progId="Origin95.Graph">
+                  <p:embed/>
+                </p:oleObj>
+              </mc:Choice>
+              <mc:Fallback>
+                <p:oleObj name="Graph" r:id="rId12" imgW="9802184" imgH="7502368" progId="Origin95.Graph">
+                  <p:embed/>
+                  <p:pic>
+                    <p:nvPicPr>
+                      <p:cNvPr id="9" name="对象 8">
+                        <a:extLst>
+                          <a:ext uri="{FF2B5EF4-FFF2-40B4-BE49-F238E27FC236}">
+                            <a16:creationId xmlns:a16="http://schemas.microsoft.com/office/drawing/2014/main" id="{9B58CC1F-4744-70DE-B08D-26C7A67477E5}"/>
+                          </a:ext>
+                        </a:extLst>
+                      </p:cNvPr>
+                      <p:cNvPicPr/>
+                      <p:nvPr/>
+                    </p:nvPicPr>
+                    <p:blipFill>
+                      <a:blip r:embed="rId13"/>
+                      <a:stretch>
+                        <a:fillRect/>
+                      </a:stretch>
+                    </p:blipFill>
+                    <p:spPr>
+                      <a:xfrm>
+                        <a:off x="10228943" y="367858"/>
+                        <a:ext cx="2021719" cy="1548885"/>
+                      </a:xfrm>
+                      <a:prstGeom prst="rect">
+                        <a:avLst/>
+                      </a:prstGeom>
+                    </p:spPr>
+                  </p:pic>
+                </p:oleObj>
+              </mc:Fallback>
+            </mc:AlternateContent>
+          </a:graphicData>
+        </a:graphic>
+      </p:graphicFrame>
+    </p:spTree>
+    <p:extLst>
+      <p:ext uri="{BB962C8B-B14F-4D97-AF65-F5344CB8AC3E}">
+        <p14:creationId xmlns:p14="http://schemas.microsoft.com/office/powerpoint/2010/main" val="1254942077"/>
+      </p:ext>
+    </p:extLst>
+  </p:cSld>
+  <p:clrMapOvr>
+    <a:masterClrMapping/>
+  </p:clrMapOvr>
+</p:sld>
+</file>
+
+<file path=ppt/slides/slide7.xml><?xml version="1.0" encoding="utf-8"?>
+<p:sld xmlns:a="http://schemas.openxmlformats.org/drawingml/2006/main" xmlns:r="http://schemas.openxmlformats.org/officeDocument/2006/relationships" xmlns:p="http://schemas.openxmlformats.org/presentationml/2006/main">
+  <p:cSld>
+    <p:spTree>
+      <p:nvGrpSpPr>
+        <p:cNvPr id="1" name=""/>
+        <p:cNvGrpSpPr/>
+        <p:nvPr/>
+      </p:nvGrpSpPr>
+      <p:grpSpPr>
+        <a:xfrm>
+          <a:off x="0" y="0"/>
+          <a:ext cx="0" cy="0"/>
+          <a:chOff x="0" y="0"/>
+          <a:chExt cx="0" cy="0"/>
+        </a:xfrm>
+      </p:grpSpPr>
+      <p:sp>
+        <p:nvSpPr>
+          <p:cNvPr id="2" name="文本框 1">
+            <a:extLst>
+              <a:ext uri="{FF2B5EF4-FFF2-40B4-BE49-F238E27FC236}">
+                <a16:creationId xmlns:a16="http://schemas.microsoft.com/office/drawing/2014/main" id="{37D54E68-7069-9BA1-CFC4-FDAF614F8D80}"/>
+              </a:ext>
+            </a:extLst>
+          </p:cNvPr>
+          <p:cNvSpPr txBox="1"/>
+          <p:nvPr/>
+        </p:nvSpPr>
+        <p:spPr>
+          <a:xfrm>
+            <a:off x="549876" y="584046"/>
+            <a:ext cx="2153154" cy="369332"/>
+          </a:xfrm>
+          <a:prstGeom prst="rect">
+            <a:avLst/>
+          </a:prstGeom>
+          <a:noFill/>
+        </p:spPr>
+        <p:txBody>
+          <a:bodyPr wrap="none" rtlCol="0">
+            <a:spAutoFit/>
+          </a:bodyPr>
+          <a:lstStyle/>
+          <a:p>
+            <a:r>
+              <a:rPr lang="en-US" altLang="zh-CN" dirty="0"/>
+              <a:t>XRD 5°-55°   20°/min</a:t>
+            </a:r>
+            <a:endParaRPr lang="zh-CN" altLang="en-US" dirty="0"/>
+          </a:p>
+        </p:txBody>
+      </p:sp>
+      <p:sp>
+        <p:nvSpPr>
+          <p:cNvPr id="3" name="文本框 2">
+            <a:extLst>
+              <a:ext uri="{FF2B5EF4-FFF2-40B4-BE49-F238E27FC236}">
+                <a16:creationId xmlns:a16="http://schemas.microsoft.com/office/drawing/2014/main" id="{4622A945-BC59-EB7E-1E31-B0B0EFD1CB93}"/>
+              </a:ext>
+            </a:extLst>
+          </p:cNvPr>
+          <p:cNvSpPr txBox="1"/>
+          <p:nvPr/>
+        </p:nvSpPr>
+        <p:spPr>
+          <a:xfrm>
+            <a:off x="549876" y="1355011"/>
+            <a:ext cx="1107996" cy="369332"/>
+          </a:xfrm>
+          <a:prstGeom prst="rect">
+            <a:avLst/>
+          </a:prstGeom>
+          <a:noFill/>
+        </p:spPr>
+        <p:txBody>
+          <a:bodyPr wrap="none" rtlCol="0">
+            <a:spAutoFit/>
+          </a:bodyPr>
+          <a:lstStyle/>
+          <a:p>
+            <a:r>
+              <a:rPr lang="zh-CN" altLang="en-US" dirty="0"/>
+              <a:t>杂峰较弱</a:t>
+            </a:r>
+          </a:p>
+        </p:txBody>
+      </p:sp>
+      <p:pic>
+        <p:nvPicPr>
+          <p:cNvPr id="5" name="图片 4">
+            <a:extLst>
+              <a:ext uri="{FF2B5EF4-FFF2-40B4-BE49-F238E27FC236}">
+                <a16:creationId xmlns:a16="http://schemas.microsoft.com/office/drawing/2014/main" id="{1DADF755-2CE5-C40A-69E9-76C50EE94515}"/>
+              </a:ext>
+            </a:extLst>
+          </p:cNvPr>
+          <p:cNvPicPr>
+            <a:picLocks noChangeAspect="1"/>
+          </p:cNvPicPr>
+          <p:nvPr/>
+        </p:nvPicPr>
+        <p:blipFill>
+          <a:blip r:embed="rId2">
+            <a:extLst>
+              <a:ext uri="{28A0092B-C50C-407E-A947-70E740481C1C}">
+                <a14:useLocalDpi xmlns:a14="http://schemas.microsoft.com/office/drawing/2010/main" val="0"/>
+              </a:ext>
+            </a:extLst>
+          </a:blip>
+          <a:srcRect l="11584" t="33333" r="13445" b="29281"/>
+          <a:stretch/>
+        </p:blipFill>
+        <p:spPr>
+          <a:xfrm>
+            <a:off x="4849906" y="410124"/>
+            <a:ext cx="6858000" cy="2563906"/>
+          </a:xfrm>
+          <a:prstGeom prst="rect">
+            <a:avLst/>
+          </a:prstGeom>
+        </p:spPr>
+      </p:pic>
+      <p:pic>
+        <p:nvPicPr>
+          <p:cNvPr id="9" name="图片 8">
+            <a:extLst>
+              <a:ext uri="{FF2B5EF4-FFF2-40B4-BE49-F238E27FC236}">
+                <a16:creationId xmlns:a16="http://schemas.microsoft.com/office/drawing/2014/main" id="{A4B0E3C9-5090-4035-8645-811E63650AEE}"/>
+              </a:ext>
+            </a:extLst>
+          </p:cNvPr>
+          <p:cNvPicPr>
+            <a:picLocks noChangeAspect="1"/>
+          </p:cNvPicPr>
+          <p:nvPr/>
+        </p:nvPicPr>
+        <p:blipFill>
+          <a:blip r:embed="rId3">
+            <a:extLst>
+              <a:ext uri="{28A0092B-C50C-407E-A947-70E740481C1C}">
+                <a14:useLocalDpi xmlns:a14="http://schemas.microsoft.com/office/drawing/2010/main" val="0"/>
+              </a:ext>
+            </a:extLst>
+          </a:blip>
+          <a:srcRect l="13838" t="32025" r="25028" b="36602"/>
+          <a:stretch/>
+        </p:blipFill>
+        <p:spPr>
+          <a:xfrm>
+            <a:off x="4849906" y="3281082"/>
+            <a:ext cx="6850428" cy="2635623"/>
+          </a:xfrm>
+          <a:prstGeom prst="rect">
+            <a:avLst/>
+          </a:prstGeom>
+        </p:spPr>
+      </p:pic>
+      <p:sp>
+        <p:nvSpPr>
+          <p:cNvPr id="10" name="文本框 9">
+            <a:extLst>
+              <a:ext uri="{FF2B5EF4-FFF2-40B4-BE49-F238E27FC236}">
+                <a16:creationId xmlns:a16="http://schemas.microsoft.com/office/drawing/2014/main" id="{D0B16AB7-D058-C6D8-3259-BBEC30213CF6}"/>
+              </a:ext>
+            </a:extLst>
+          </p:cNvPr>
+          <p:cNvSpPr txBox="1"/>
+          <p:nvPr/>
+        </p:nvSpPr>
+        <p:spPr>
+          <a:xfrm>
+            <a:off x="549876" y="2125976"/>
+            <a:ext cx="3435364" cy="1477328"/>
+          </a:xfrm>
+          <a:prstGeom prst="rect">
+            <a:avLst/>
+          </a:prstGeom>
+          <a:noFill/>
+        </p:spPr>
+        <p:txBody>
+          <a:bodyPr wrap="none" rtlCol="0">
+            <a:spAutoFit/>
+          </a:bodyPr>
+          <a:lstStyle/>
+          <a:p>
+            <a:r>
+              <a:rPr lang="zh-CN" altLang="en-US" dirty="0"/>
+              <a:t>晶体粉末有点粘在壁上</a:t>
+            </a:r>
+            <a:endParaRPr lang="en-US" altLang="zh-CN" dirty="0"/>
+          </a:p>
+          <a:p>
+            <a:endParaRPr lang="en-US" altLang="zh-CN" dirty="0"/>
+          </a:p>
+          <a:p>
+            <a:r>
+              <a:rPr lang="zh-CN" altLang="en-US" dirty="0"/>
+              <a:t>放在烘箱里烘干了两天</a:t>
+            </a:r>
+            <a:endParaRPr lang="en-US" altLang="zh-CN" dirty="0"/>
+          </a:p>
+          <a:p>
+            <a:endParaRPr lang="en-US" altLang="zh-CN" dirty="0"/>
+          </a:p>
+          <a:p>
+            <a:r>
+              <a:rPr lang="zh-CN" altLang="en-US" dirty="0"/>
+              <a:t>随着</a:t>
+            </a:r>
+            <a:r>
+              <a:rPr lang="en-US" altLang="zh-CN" dirty="0"/>
+              <a:t>FAAC</a:t>
+            </a:r>
+            <a:r>
+              <a:rPr lang="zh-CN" altLang="en-US" dirty="0"/>
+              <a:t>的比例增大，粉末变暗</a:t>
+            </a:r>
+          </a:p>
+        </p:txBody>
+      </p:sp>
+    </p:spTree>
+    <p:extLst>
+      <p:ext uri="{BB962C8B-B14F-4D97-AF65-F5344CB8AC3E}">
+        <p14:creationId xmlns:p14="http://schemas.microsoft.com/office/powerpoint/2010/main" val="1645510557"/>
+      </p:ext>
+    </p:extLst>
+  </p:cSld>
+  <p:clrMapOvr>
+    <a:masterClrMapping/>
+  </p:clrMapOvr>
+</p:sld>
+</file>
+
 <file path=ppt/tags/tag1.xml><?xml version="1.0" encoding="utf-8"?>
 <p:tagLst xmlns:a="http://schemas.openxmlformats.org/drawingml/2006/main" xmlns:r="http://schemas.openxmlformats.org/officeDocument/2006/relationships" xmlns:p="http://schemas.openxmlformats.org/presentationml/2006/main">
   <p:tag name="COMMONDATA" val="eyJoZGlkIjoiNTg0MzMyNGJiMDEzODc5ODNlMGVjODViOWRkZjg1MDgifQ=="/>
